--- a/presentation/Snowflake AI for FinOps—Devopsdays-05012026.pptx
+++ b/presentation/Snowflake AI for FinOps—Devopsdays-05012026.pptx
@@ -5,34 +5,35 @@
     <p:sldMasterId id="2147483648" r:id="rId1"/>
   </p:sldMasterIdLst>
   <p:notesMasterIdLst>
-    <p:notesMasterId r:id="rId17"/>
+    <p:notesMasterId r:id="rId18"/>
   </p:notesMasterIdLst>
   <p:sldIdLst>
     <p:sldId id="256" r:id="rId2"/>
-    <p:sldId id="272" r:id="rId3"/>
-    <p:sldId id="258" r:id="rId4"/>
-    <p:sldId id="261" r:id="rId5"/>
-    <p:sldId id="259" r:id="rId6"/>
-    <p:sldId id="260" r:id="rId7"/>
-    <p:sldId id="262" r:id="rId8"/>
-    <p:sldId id="263" r:id="rId9"/>
-    <p:sldId id="264" r:id="rId10"/>
-    <p:sldId id="265" r:id="rId11"/>
-    <p:sldId id="266" r:id="rId12"/>
-    <p:sldId id="271" r:id="rId13"/>
-    <p:sldId id="267" r:id="rId14"/>
-    <p:sldId id="268" r:id="rId15"/>
-    <p:sldId id="270" r:id="rId16"/>
+    <p:sldId id="273" r:id="rId3"/>
+    <p:sldId id="272" r:id="rId4"/>
+    <p:sldId id="258" r:id="rId5"/>
+    <p:sldId id="261" r:id="rId6"/>
+    <p:sldId id="259" r:id="rId7"/>
+    <p:sldId id="260" r:id="rId8"/>
+    <p:sldId id="262" r:id="rId9"/>
+    <p:sldId id="263" r:id="rId10"/>
+    <p:sldId id="264" r:id="rId11"/>
+    <p:sldId id="265" r:id="rId12"/>
+    <p:sldId id="266" r:id="rId13"/>
+    <p:sldId id="271" r:id="rId14"/>
+    <p:sldId id="267" r:id="rId15"/>
+    <p:sldId id="268" r:id="rId16"/>
+    <p:sldId id="270" r:id="rId17"/>
   </p:sldIdLst>
   <p:sldSz cx="12192000" cy="6858000"/>
   <p:notesSz cx="6858000" cy="9144000"/>
   <p:embeddedFontLst>
     <p:embeddedFont>
-      <p:font typeface="Montserrat" pitchFamily="2" charset="77"/>
-      <p:regular r:id="rId18"/>
-      <p:bold r:id="rId19"/>
-      <p:italic r:id="rId20"/>
-      <p:boldItalic r:id="rId21"/>
+      <p:font typeface="Montserrat" panose="00000500000000000000" pitchFamily="2" charset="0"/>
+      <p:regular r:id="rId19"/>
+      <p:bold r:id="rId20"/>
+      <p:italic r:id="rId21"/>
+      <p:boldItalic r:id="rId22"/>
     </p:embeddedFont>
   </p:embeddedFontLst>
   <p:defaultTextStyle>
@@ -269,7 +270,7 @@
       <p15:sldGuideLst xmlns:p15="http://schemas.microsoft.com/office/powerpoint/2012/main"/>
     </p:ext>
     <p:ext uri="GoogleSlidesCustomDataVersion2">
-      <go:slidesCustomData xmlns:go="http://customooxmlschemas.google.com/" xmlns:ahyp="http://schemas.microsoft.com/office/drawing/2018/hyperlinkcolor" xmlns:p15="http://schemas.microsoft.com/office/powerpoint/2012/main" xmlns:p14="http://schemas.microsoft.com/office/powerpoint/2010/main" xmlns:com="http://schemas.openxmlformats.org/drawingml/2006/compatibility" xmlns:pvml="urn:schemas-microsoft-com:office:powerpoint" xmlns:v="urn:schemas-microsoft-com:vml" xmlns:o="urn:schemas-microsoft-com:office:office" xmlns:dgm="http://schemas.openxmlformats.org/drawingml/2006/diagram" xmlns:c="http://schemas.openxmlformats.org/drawingml/2006/chart" xmlns:mv="urn:schemas-microsoft-com:mac:vml" xmlns:mc="http://schemas.openxmlformats.org/markup-compatibility/2006" xmlns="" r:id="rId22" roundtripDataSignature="AMtx7mgXJgl4xqdZDSxoo+rh88zjTHGBHw=="/>
+      <go:slidesCustomData xmlns="" xmlns:mc="http://schemas.openxmlformats.org/markup-compatibility/2006" xmlns:mv="urn:schemas-microsoft-com:mac:vml" xmlns:c="http://schemas.openxmlformats.org/drawingml/2006/chart" xmlns:dgm="http://schemas.openxmlformats.org/drawingml/2006/diagram" xmlns:o="urn:schemas-microsoft-com:office:office" xmlns:v="urn:schemas-microsoft-com:vml" xmlns:pvml="urn:schemas-microsoft-com:office:powerpoint" xmlns:com="http://schemas.openxmlformats.org/drawingml/2006/compatibility" xmlns:p14="http://schemas.microsoft.com/office/powerpoint/2010/main" xmlns:p15="http://schemas.microsoft.com/office/powerpoint/2012/main" xmlns:ahyp="http://schemas.microsoft.com/office/drawing/2018/hyperlinkcolor" xmlns:go="http://customooxmlschemas.google.com/" r:id="rId23" roundtripDataSignature="AMtx7mgXJgl4xqdZDSxoo+rh88zjTHGBHw=="/>
     </p:ext>
   </p:extLst>
 </p:presentation>
@@ -10987,6 +10988,811 @@
         </p:nvSpPr>
         <p:spPr>
           <a:xfrm>
+            <a:off x="640080" y="314007"/>
+            <a:ext cx="10515600" cy="735542"/>
+          </a:xfrm>
+        </p:spPr>
+        <p:txBody>
+          <a:bodyPr/>
+          <a:lstStyle/>
+          <a:p>
+            <a:r>
+              <a:rPr sz="2800" b="1" dirty="0">
+                <a:solidFill>
+                  <a:srgbClr val="058DC7"/>
+                </a:solidFill>
+                <a:latin typeface="Montserrat"/>
+              </a:rPr>
+              <a:t>Token &amp; Credit Usage Tracking</a:t>
+            </a:r>
+          </a:p>
+        </p:txBody>
+      </p:sp>
+      <p:sp>
+        <p:nvSpPr>
+          <p:cNvPr id="3" name="TextBox 2"/>
+          <p:cNvSpPr txBox="1"/>
+          <p:nvPr/>
+        </p:nvSpPr>
+        <p:spPr>
+          <a:xfrm>
+            <a:off x="640080" y="1005840"/>
+            <a:ext cx="10515600" cy="307777"/>
+          </a:xfrm>
+          <a:prstGeom prst="rect">
+            <a:avLst/>
+          </a:prstGeom>
+          <a:noFill/>
+        </p:spPr>
+        <p:txBody>
+          <a:bodyPr wrap="square">
+            <a:spAutoFit/>
+          </a:bodyPr>
+          <a:lstStyle/>
+          <a:p>
+            <a:pPr algn="l">
+              <a:defRPr sz="1400" b="0">
+                <a:solidFill>
+                  <a:srgbClr val="666666"/>
+                </a:solidFill>
+                <a:latin typeface="Montserrat"/>
+              </a:defRPr>
+            </a:pPr>
+            <a:r>
+              <a:rPr dirty="0"/>
+              <a:t>Module 06 </a:t>
+            </a:r>
+            <a:r>
+              <a:rPr lang="en-US" dirty="0"/>
+              <a:t>-</a:t>
+            </a:r>
+            <a:r>
+              <a:rPr dirty="0"/>
+              <a:t> Your real-time FinOps console</a:t>
+            </a:r>
+          </a:p>
+        </p:txBody>
+      </p:sp>
+      <p:sp>
+        <p:nvSpPr>
+          <p:cNvPr id="4" name="Rounded Rectangle 3"/>
+          <p:cNvSpPr/>
+          <p:nvPr/>
+        </p:nvSpPr>
+        <p:spPr>
+          <a:xfrm>
+            <a:off x="640080" y="1463040"/>
+            <a:ext cx="5029200" cy="1097280"/>
+          </a:xfrm>
+          <a:prstGeom prst="roundRect">
+            <a:avLst/>
+          </a:prstGeom>
+          <a:solidFill>
+            <a:srgbClr val="F3F3F3"/>
+          </a:solidFill>
+          <a:ln w="12700">
+            <a:solidFill>
+              <a:srgbClr val="DDDDDD"/>
+            </a:solidFill>
+          </a:ln>
+          <a:effectLst/>
+        </p:spPr>
+        <p:style>
+          <a:lnRef idx="1">
+            <a:schemeClr val="accent1"/>
+          </a:lnRef>
+          <a:fillRef idx="3">
+            <a:schemeClr val="accent1"/>
+          </a:fillRef>
+          <a:effectRef idx="2">
+            <a:schemeClr val="accent1"/>
+          </a:effectRef>
+          <a:fontRef idx="minor">
+            <a:schemeClr val="lt1"/>
+          </a:fontRef>
+        </p:style>
+        <p:txBody>
+          <a:bodyPr wrap="square" lIns="137160" tIns="91440" rtlCol="0" anchor="ctr"/>
+          <a:lstStyle/>
+          <a:p>
+            <a:pPr algn="ctr">
+              <a:spcAft>
+                <a:spcPts val="400"/>
+              </a:spcAft>
+            </a:pPr>
+            <a:r>
+              <a:rPr sz="1300" b="1" dirty="0">
+                <a:solidFill>
+                  <a:srgbClr val="058DC7"/>
+                </a:solidFill>
+                <a:latin typeface="Montserrat"/>
+              </a:rPr>
+              <a:t>Q1–Q5: Core Tracking</a:t>
+            </a:r>
+          </a:p>
+          <a:p>
+            <a:pPr>
+              <a:spcBef>
+                <a:spcPts val="100"/>
+              </a:spcBef>
+              <a:spcAft>
+                <a:spcPts val="100"/>
+              </a:spcAft>
+            </a:pPr>
+            <a:r>
+              <a:rPr sz="1200" dirty="0">
+                <a:solidFill>
+                  <a:srgbClr val="333333"/>
+                </a:solidFill>
+                <a:latin typeface="Montserrat"/>
+              </a:rPr>
+              <a:t>▸ AI credits by function, model, hour</a:t>
+            </a:r>
+          </a:p>
+          <a:p>
+            <a:pPr>
+              <a:spcBef>
+                <a:spcPts val="100"/>
+              </a:spcBef>
+              <a:spcAft>
+                <a:spcPts val="100"/>
+              </a:spcAft>
+            </a:pPr>
+            <a:r>
+              <a:rPr sz="1200" dirty="0">
+                <a:solidFill>
+                  <a:srgbClr val="333333"/>
+                </a:solidFill>
+                <a:latin typeface="Montserrat"/>
+              </a:rPr>
+              <a:t>▸ Cost projection from dedicated views</a:t>
+            </a:r>
+          </a:p>
+        </p:txBody>
+      </p:sp>
+      <p:sp>
+        <p:nvSpPr>
+          <p:cNvPr id="5" name="Rounded Rectangle 4"/>
+          <p:cNvSpPr/>
+          <p:nvPr/>
+        </p:nvSpPr>
+        <p:spPr>
+          <a:xfrm>
+            <a:off x="6126480" y="1463040"/>
+            <a:ext cx="5029200" cy="1097280"/>
+          </a:xfrm>
+          <a:prstGeom prst="roundRect">
+            <a:avLst/>
+          </a:prstGeom>
+          <a:solidFill>
+            <a:srgbClr val="F3F3F3"/>
+          </a:solidFill>
+          <a:ln w="12700">
+            <a:solidFill>
+              <a:srgbClr val="DDDDDD"/>
+            </a:solidFill>
+          </a:ln>
+          <a:effectLst/>
+        </p:spPr>
+        <p:style>
+          <a:lnRef idx="1">
+            <a:schemeClr val="accent1"/>
+          </a:lnRef>
+          <a:fillRef idx="3">
+            <a:schemeClr val="accent1"/>
+          </a:fillRef>
+          <a:effectRef idx="2">
+            <a:schemeClr val="accent1"/>
+          </a:effectRef>
+          <a:fontRef idx="minor">
+            <a:schemeClr val="lt1"/>
+          </a:fontRef>
+        </p:style>
+        <p:txBody>
+          <a:bodyPr wrap="square" lIns="137160" tIns="91440" rtlCol="0" anchor="ctr"/>
+          <a:lstStyle/>
+          <a:p>
+            <a:pPr algn="ctr">
+              <a:spcAft>
+                <a:spcPts val="400"/>
+              </a:spcAft>
+            </a:pPr>
+            <a:r>
+              <a:rPr sz="1300" b="1" dirty="0">
+                <a:solidFill>
+                  <a:srgbClr val="058DC7"/>
+                </a:solidFill>
+                <a:latin typeface="Montserrat"/>
+              </a:rPr>
+              <a:t>Q6: Idle Search Detection</a:t>
+            </a:r>
+          </a:p>
+          <a:p>
+            <a:pPr>
+              <a:spcBef>
+                <a:spcPts val="100"/>
+              </a:spcBef>
+              <a:spcAft>
+                <a:spcPts val="100"/>
+              </a:spcAft>
+            </a:pPr>
+            <a:r>
+              <a:rPr sz="1200" dirty="0">
+                <a:solidFill>
+                  <a:srgbClr val="333333"/>
+                </a:solidFill>
+                <a:latin typeface="Montserrat"/>
+              </a:rPr>
+              <a:t>▸ Search indexing with zero queries</a:t>
+            </a:r>
+          </a:p>
+          <a:p>
+            <a:pPr>
+              <a:spcBef>
+                <a:spcPts val="100"/>
+              </a:spcBef>
+              <a:spcAft>
+                <a:spcPts val="100"/>
+              </a:spcAft>
+            </a:pPr>
+            <a:r>
+              <a:rPr sz="1200" dirty="0">
+                <a:solidFill>
+                  <a:srgbClr val="333333"/>
+                </a:solidFill>
+                <a:latin typeface="Montserrat"/>
+              </a:rPr>
+              <a:t>▸ 100% waste (Transition → Module 07)</a:t>
+            </a:r>
+          </a:p>
+        </p:txBody>
+      </p:sp>
+      <p:sp>
+        <p:nvSpPr>
+          <p:cNvPr id="6" name="Rounded Rectangle 5"/>
+          <p:cNvSpPr/>
+          <p:nvPr/>
+        </p:nvSpPr>
+        <p:spPr>
+          <a:xfrm>
+            <a:off x="640080" y="2743200"/>
+            <a:ext cx="5029200" cy="1097280"/>
+          </a:xfrm>
+          <a:prstGeom prst="roundRect">
+            <a:avLst/>
+          </a:prstGeom>
+          <a:solidFill>
+            <a:srgbClr val="F3F3F3"/>
+          </a:solidFill>
+          <a:ln w="25400">
+            <a:solidFill>
+              <a:srgbClr val="CC0000"/>
+            </a:solidFill>
+          </a:ln>
+          <a:effectLst/>
+        </p:spPr>
+        <p:style>
+          <a:lnRef idx="1">
+            <a:schemeClr val="accent1"/>
+          </a:lnRef>
+          <a:fillRef idx="3">
+            <a:schemeClr val="accent1"/>
+          </a:fillRef>
+          <a:effectRef idx="2">
+            <a:schemeClr val="accent1"/>
+          </a:effectRef>
+          <a:fontRef idx="minor">
+            <a:schemeClr val="lt1"/>
+          </a:fontRef>
+        </p:style>
+        <p:txBody>
+          <a:bodyPr wrap="square" lIns="137160" tIns="91440" rtlCol="0" anchor="ctr"/>
+          <a:lstStyle/>
+          <a:p>
+            <a:pPr algn="ctr">
+              <a:spcAft>
+                <a:spcPts val="400"/>
+              </a:spcAft>
+            </a:pPr>
+            <a:r>
+              <a:rPr sz="1300" b="1" dirty="0">
+                <a:solidFill>
+                  <a:srgbClr val="058DC7"/>
+                </a:solidFill>
+                <a:latin typeface="Montserrat"/>
+              </a:rPr>
+              <a:t>Q7: Over-Sized Models</a:t>
+            </a:r>
+          </a:p>
+          <a:p>
+            <a:pPr>
+              <a:spcBef>
+                <a:spcPts val="100"/>
+              </a:spcBef>
+              <a:spcAft>
+                <a:spcPts val="100"/>
+              </a:spcAft>
+            </a:pPr>
+            <a:r>
+              <a:rPr sz="1200" dirty="0">
+                <a:solidFill>
+                  <a:srgbClr val="333333"/>
+                </a:solidFill>
+                <a:latin typeface="Montserrat"/>
+              </a:rPr>
+              <a:t>▸ credits_per_1M_tokens metric</a:t>
+            </a:r>
+          </a:p>
+          <a:p>
+            <a:pPr>
+              <a:spcBef>
+                <a:spcPts val="100"/>
+              </a:spcBef>
+              <a:spcAft>
+                <a:spcPts val="100"/>
+              </a:spcAft>
+            </a:pPr>
+            <a:r>
+              <a:rPr sz="1200" dirty="0">
+                <a:solidFill>
+                  <a:srgbClr val="333333"/>
+                </a:solidFill>
+                <a:latin typeface="Montserrat"/>
+              </a:rPr>
+              <a:t>▸ Find where cheaper models suffice (40–75% savings)</a:t>
+            </a:r>
+          </a:p>
+        </p:txBody>
+      </p:sp>
+      <p:sp>
+        <p:nvSpPr>
+          <p:cNvPr id="7" name="Rounded Rectangle 6"/>
+          <p:cNvSpPr/>
+          <p:nvPr/>
+        </p:nvSpPr>
+        <p:spPr>
+          <a:xfrm>
+            <a:off x="6126480" y="2743200"/>
+            <a:ext cx="5029200" cy="1097280"/>
+          </a:xfrm>
+          <a:prstGeom prst="roundRect">
+            <a:avLst/>
+          </a:prstGeom>
+          <a:solidFill>
+            <a:srgbClr val="F3F3F3"/>
+          </a:solidFill>
+          <a:ln w="25400">
+            <a:solidFill>
+              <a:srgbClr val="CC0000"/>
+            </a:solidFill>
+          </a:ln>
+          <a:effectLst/>
+        </p:spPr>
+        <p:style>
+          <a:lnRef idx="1">
+            <a:schemeClr val="accent1"/>
+          </a:lnRef>
+          <a:fillRef idx="3">
+            <a:schemeClr val="accent1"/>
+          </a:fillRef>
+          <a:effectRef idx="2">
+            <a:schemeClr val="accent1"/>
+          </a:effectRef>
+          <a:fontRef idx="minor">
+            <a:schemeClr val="lt1"/>
+          </a:fontRef>
+        </p:style>
+        <p:txBody>
+          <a:bodyPr wrap="square" lIns="137160" tIns="91440" rtlCol="0" anchor="ctr"/>
+          <a:lstStyle/>
+          <a:p>
+            <a:pPr algn="ctr">
+              <a:spcAft>
+                <a:spcPts val="400"/>
+              </a:spcAft>
+            </a:pPr>
+            <a:r>
+              <a:rPr sz="1300" b="1" dirty="0">
+                <a:solidFill>
+                  <a:srgbClr val="058DC7"/>
+                </a:solidFill>
+                <a:latin typeface="Montserrat"/>
+              </a:rPr>
+              <a:t>Q8–Q9: Redundant Calls &amp; Prompt Bloat</a:t>
+            </a:r>
+          </a:p>
+          <a:p>
+            <a:pPr>
+              <a:spcBef>
+                <a:spcPts val="100"/>
+              </a:spcBef>
+              <a:spcAft>
+                <a:spcPts val="100"/>
+              </a:spcAft>
+            </a:pPr>
+            <a:r>
+              <a:rPr sz="1200" dirty="0">
+                <a:solidFill>
+                  <a:srgbClr val="333333"/>
+                </a:solidFill>
+                <a:latin typeface="Montserrat"/>
+              </a:rPr>
+              <a:t>▸ Duplicate pipelines detected</a:t>
+            </a:r>
+          </a:p>
+          <a:p>
+            <a:pPr>
+              <a:spcBef>
+                <a:spcPts val="100"/>
+              </a:spcBef>
+              <a:spcAft>
+                <a:spcPts val="100"/>
+              </a:spcAft>
+            </a:pPr>
+            <a:r>
+              <a:rPr sz="1200" dirty="0">
+                <a:solidFill>
+                  <a:srgbClr val="333333"/>
+                </a:solidFill>
+                <a:latin typeface="Montserrat"/>
+              </a:rPr>
+              <a:t>▸ Rising avg tokens/call over time</a:t>
+            </a:r>
+          </a:p>
+        </p:txBody>
+      </p:sp>
+      <p:sp>
+        <p:nvSpPr>
+          <p:cNvPr id="8" name="Rounded Rectangle 7"/>
+          <p:cNvSpPr/>
+          <p:nvPr/>
+        </p:nvSpPr>
+        <p:spPr>
+          <a:xfrm>
+            <a:off x="640080" y="4023360"/>
+            <a:ext cx="5029200" cy="1097280"/>
+          </a:xfrm>
+          <a:prstGeom prst="roundRect">
+            <a:avLst/>
+          </a:prstGeom>
+          <a:solidFill>
+            <a:srgbClr val="F3F3F3"/>
+          </a:solidFill>
+          <a:ln w="25400">
+            <a:solidFill>
+              <a:srgbClr val="CC0000"/>
+            </a:solidFill>
+          </a:ln>
+          <a:effectLst/>
+        </p:spPr>
+        <p:style>
+          <a:lnRef idx="1">
+            <a:schemeClr val="accent1"/>
+          </a:lnRef>
+          <a:fillRef idx="3">
+            <a:schemeClr val="accent1"/>
+          </a:fillRef>
+          <a:effectRef idx="2">
+            <a:schemeClr val="accent1"/>
+          </a:effectRef>
+          <a:fontRef idx="minor">
+            <a:schemeClr val="lt1"/>
+          </a:fontRef>
+        </p:style>
+        <p:txBody>
+          <a:bodyPr wrap="square" lIns="137160" tIns="91440" rtlCol="0" anchor="ctr"/>
+          <a:lstStyle/>
+          <a:p>
+            <a:pPr algn="ctr">
+              <a:spcAft>
+                <a:spcPts val="400"/>
+              </a:spcAft>
+            </a:pPr>
+            <a:r>
+              <a:rPr sz="1300" b="1" dirty="0">
+                <a:solidFill>
+                  <a:srgbClr val="058DC7"/>
+                </a:solidFill>
+                <a:latin typeface="Montserrat"/>
+              </a:rPr>
+              <a:t>Q10–Q11: Agent Loops &amp; Dev in Prod</a:t>
+            </a:r>
+          </a:p>
+          <a:p>
+            <a:pPr>
+              <a:spcBef>
+                <a:spcPts val="100"/>
+              </a:spcBef>
+              <a:spcAft>
+                <a:spcPts val="100"/>
+              </a:spcAft>
+            </a:pPr>
+            <a:r>
+              <a:rPr sz="1200" dirty="0">
+                <a:solidFill>
+                  <a:srgbClr val="333333"/>
+                </a:solidFill>
+                <a:latin typeface="Montserrat"/>
+              </a:rPr>
+              <a:t>▸ MAX vs AVG credit gap</a:t>
+            </a:r>
+          </a:p>
+          <a:p>
+            <a:pPr>
+              <a:spcBef>
+                <a:spcPts val="100"/>
+              </a:spcBef>
+              <a:spcAft>
+                <a:spcPts val="100"/>
+              </a:spcAft>
+            </a:pPr>
+            <a:r>
+              <a:rPr sz="1200" dirty="0">
+                <a:solidFill>
+                  <a:srgbClr val="333333"/>
+                </a:solidFill>
+                <a:latin typeface="Montserrat"/>
+              </a:rPr>
+              <a:t>▸ LATERAL FLATTEN(ROLE_NAMES)</a:t>
+            </a:r>
+          </a:p>
+        </p:txBody>
+      </p:sp>
+      <p:sp>
+        <p:nvSpPr>
+          <p:cNvPr id="9" name="Rounded Rectangle 8"/>
+          <p:cNvSpPr/>
+          <p:nvPr/>
+        </p:nvSpPr>
+        <p:spPr>
+          <a:xfrm>
+            <a:off x="6126480" y="4023360"/>
+            <a:ext cx="5029200" cy="1097280"/>
+          </a:xfrm>
+          <a:prstGeom prst="roundRect">
+            <a:avLst/>
+          </a:prstGeom>
+          <a:solidFill>
+            <a:srgbClr val="F3F3F3"/>
+          </a:solidFill>
+          <a:ln w="25400">
+            <a:solidFill>
+              <a:srgbClr val="CC0000"/>
+            </a:solidFill>
+          </a:ln>
+          <a:effectLst/>
+        </p:spPr>
+        <p:style>
+          <a:lnRef idx="1">
+            <a:schemeClr val="accent1"/>
+          </a:lnRef>
+          <a:fillRef idx="3">
+            <a:schemeClr val="accent1"/>
+          </a:fillRef>
+          <a:effectRef idx="2">
+            <a:schemeClr val="accent1"/>
+          </a:effectRef>
+          <a:fontRef idx="minor">
+            <a:schemeClr val="lt1"/>
+          </a:fontRef>
+        </p:style>
+        <p:txBody>
+          <a:bodyPr wrap="square" lIns="137160" tIns="91440" rtlCol="0" anchor="ctr"/>
+          <a:lstStyle/>
+          <a:p>
+            <a:pPr algn="ctr">
+              <a:spcAft>
+                <a:spcPts val="400"/>
+              </a:spcAft>
+            </a:pPr>
+            <a:r>
+              <a:rPr sz="1300" b="1" dirty="0">
+                <a:solidFill>
+                  <a:srgbClr val="058DC7"/>
+                </a:solidFill>
+                <a:latin typeface="Montserrat"/>
+              </a:rPr>
+              <a:t>Q12–Q13: Anomaly &amp; Attribution</a:t>
+            </a:r>
+          </a:p>
+          <a:p>
+            <a:pPr>
+              <a:spcBef>
+                <a:spcPts val="100"/>
+              </a:spcBef>
+              <a:spcAft>
+                <a:spcPts val="100"/>
+              </a:spcAft>
+            </a:pPr>
+            <a:r>
+              <a:rPr sz="1200" dirty="0">
+                <a:solidFill>
+                  <a:srgbClr val="333333"/>
+                </a:solidFill>
+                <a:latin typeface="Montserrat"/>
+              </a:rPr>
+              <a:t>▸ WoW LAG(7) spike detection</a:t>
+            </a:r>
+          </a:p>
+          <a:p>
+            <a:pPr>
+              <a:spcBef>
+                <a:spcPts val="100"/>
+              </a:spcBef>
+              <a:spcAft>
+                <a:spcPts val="100"/>
+              </a:spcAft>
+            </a:pPr>
+            <a:r>
+              <a:rPr sz="1200" dirty="0">
+                <a:solidFill>
+                  <a:srgbClr val="333333"/>
+                </a:solidFill>
+                <a:latin typeface="Montserrat"/>
+              </a:rPr>
+              <a:t>▸ Tagged vs untagged spend ratio</a:t>
+            </a:r>
+          </a:p>
+        </p:txBody>
+      </p:sp>
+      <p:sp>
+        <p:nvSpPr>
+          <p:cNvPr id="11" name="TextBox 10"/>
+          <p:cNvSpPr txBox="1"/>
+          <p:nvPr/>
+        </p:nvSpPr>
+        <p:spPr>
+          <a:xfrm>
+            <a:off x="9601200" y="6400800"/>
+            <a:ext cx="2286000" cy="320040"/>
+          </a:xfrm>
+          <a:prstGeom prst="rect">
+            <a:avLst/>
+          </a:prstGeom>
+          <a:noFill/>
+        </p:spPr>
+        <p:txBody>
+          <a:bodyPr wrap="square">
+            <a:spAutoFit/>
+          </a:bodyPr>
+          <a:lstStyle/>
+          <a:p>
+            <a:pPr algn="r">
+              <a:defRPr sz="1000" b="1">
+                <a:solidFill>
+                  <a:srgbClr val="666666"/>
+                </a:solidFill>
+                <a:latin typeface="Montserrat"/>
+              </a:defRPr>
+            </a:pPr>
+            <a:r>
+              <a:t>#DevOpsDays</a:t>
+            </a:r>
+          </a:p>
+        </p:txBody>
+      </p:sp>
+      <p:sp>
+        <p:nvSpPr>
+          <p:cNvPr id="12" name="Rounded Rectangle 11">
+            <a:extLst>
+              <a:ext uri="{FF2B5EF4-FFF2-40B4-BE49-F238E27FC236}">
+                <a16:creationId xmlns:a16="http://schemas.microsoft.com/office/drawing/2014/main" id="{B77A33F7-53F7-125D-4B70-7492B6EC7DBB}"/>
+              </a:ext>
+            </a:extLst>
+          </p:cNvPr>
+          <p:cNvSpPr/>
+          <p:nvPr/>
+        </p:nvSpPr>
+        <p:spPr>
+          <a:xfrm>
+            <a:off x="1500985" y="5296411"/>
+            <a:ext cx="8983133" cy="928617"/>
+          </a:xfrm>
+          <a:prstGeom prst="roundRect">
+            <a:avLst/>
+          </a:prstGeom>
+          <a:solidFill>
+            <a:srgbClr val="069ED8"/>
+          </a:solidFill>
+          <a:ln w="12700">
+            <a:solidFill>
+              <a:srgbClr val="FFFFFF"/>
+            </a:solidFill>
+          </a:ln>
+          <a:effectLst/>
+        </p:spPr>
+        <p:style>
+          <a:lnRef idx="1">
+            <a:schemeClr val="accent1"/>
+          </a:lnRef>
+          <a:fillRef idx="3">
+            <a:schemeClr val="accent1"/>
+          </a:fillRef>
+          <a:effectRef idx="2">
+            <a:schemeClr val="accent1"/>
+          </a:effectRef>
+          <a:fontRef idx="minor">
+            <a:schemeClr val="lt1"/>
+          </a:fontRef>
+        </p:style>
+        <p:txBody>
+          <a:bodyPr wrap="square" rtlCol="0" anchor="ctr"/>
+          <a:lstStyle/>
+          <a:p>
+            <a:pPr marL="171450" indent="-171450">
+              <a:spcBef>
+                <a:spcPts val="600"/>
+              </a:spcBef>
+              <a:buFont typeface="Arial" panose="020B0604020202020204" pitchFamily="34" charset="0"/>
+              <a:buChar char="•"/>
+            </a:pPr>
+            <a:r>
+              <a:rPr lang="en-US" dirty="0">
+                <a:solidFill>
+                  <a:schemeClr val="tx1"/>
+                </a:solidFill>
+                <a:latin typeface="Montserrat"/>
+              </a:rPr>
+              <a:t>Shadow Waste: Detect patterns of hidden AI credit drain. </a:t>
+            </a:r>
+          </a:p>
+          <a:p>
+            <a:pPr marL="171450" indent="-171450">
+              <a:spcBef>
+                <a:spcPts val="600"/>
+              </a:spcBef>
+              <a:buFont typeface="Arial" panose="020B0604020202020204" pitchFamily="34" charset="0"/>
+              <a:buChar char="•"/>
+            </a:pPr>
+            <a:r>
+              <a:rPr lang="en-US" dirty="0">
+                <a:solidFill>
+                  <a:schemeClr val="tx1"/>
+                </a:solidFill>
+                <a:latin typeface="Montserrat"/>
+              </a:rPr>
+              <a:t>AI services are serverless - no warehouse to watch, no query fails. Credits silently accumulate.</a:t>
+            </a:r>
+          </a:p>
+        </p:txBody>
+      </p:sp>
+    </p:spTree>
+  </p:cSld>
+  <p:clrMapOvr>
+    <a:masterClrMapping/>
+  </p:clrMapOvr>
+</p:sld>
+</file>
+
+<file path=ppt/slides/slide11.xml><?xml version="1.0" encoding="utf-8"?>
+<p:sld xmlns:a="http://schemas.openxmlformats.org/drawingml/2006/main" xmlns:r="http://schemas.openxmlformats.org/officeDocument/2006/relationships" xmlns:p="http://schemas.openxmlformats.org/presentationml/2006/main">
+  <p:cSld>
+    <p:spTree>
+      <p:nvGrpSpPr>
+        <p:cNvPr id="1" name=""/>
+        <p:cNvGrpSpPr/>
+        <p:nvPr/>
+      </p:nvGrpSpPr>
+      <p:grpSpPr>
+        <a:xfrm>
+          <a:off x="0" y="0"/>
+          <a:ext cx="0" cy="0"/>
+          <a:chOff x="0" y="0"/>
+          <a:chExt cx="0" cy="0"/>
+        </a:xfrm>
+      </p:grpSpPr>
+      <p:sp>
+        <p:nvSpPr>
+          <p:cNvPr id="2" name="Title 1"/>
+          <p:cNvSpPr>
+            <a:spLocks noGrp="1"/>
+          </p:cNvSpPr>
+          <p:nvPr>
+            <p:ph type="title"/>
+          </p:nvPr>
+        </p:nvSpPr>
+        <p:spPr>
+          <a:xfrm>
             <a:off x="711200" y="365125"/>
             <a:ext cx="10515600" cy="640715"/>
           </a:xfrm>
@@ -11765,7 +12571,7 @@
 </p:sld>
 </file>
 
-<file path=ppt/slides/slide11.xml><?xml version="1.0" encoding="utf-8"?>
+<file path=ppt/slides/slide12.xml><?xml version="1.0" encoding="utf-8"?>
 <p:sld xmlns:a="http://schemas.openxmlformats.org/drawingml/2006/main" xmlns:r="http://schemas.openxmlformats.org/officeDocument/2006/relationships" xmlns:p="http://schemas.openxmlformats.org/presentationml/2006/main">
   <p:cSld>
     <p:spTree>
@@ -12402,7 +13208,7 @@
 </p:sld>
 </file>
 
-<file path=ppt/slides/slide12.xml><?xml version="1.0" encoding="utf-8"?>
+<file path=ppt/slides/slide13.xml><?xml version="1.0" encoding="utf-8"?>
 <p:sld xmlns:a="http://schemas.openxmlformats.org/drawingml/2006/main" xmlns:r="http://schemas.openxmlformats.org/officeDocument/2006/relationships" xmlns:p="http://schemas.openxmlformats.org/presentationml/2006/main">
   <p:cSld>
     <p:spTree>
@@ -12462,7 +13268,7 @@
 </p:sld>
 </file>
 
-<file path=ppt/slides/slide13.xml><?xml version="1.0" encoding="utf-8"?>
+<file path=ppt/slides/slide14.xml><?xml version="1.0" encoding="utf-8"?>
 <p:sld xmlns:a="http://schemas.openxmlformats.org/drawingml/2006/main" xmlns:r="http://schemas.openxmlformats.org/officeDocument/2006/relationships" xmlns:p="http://schemas.openxmlformats.org/presentationml/2006/main">
   <p:cSld>
     <p:spTree>
@@ -13112,7 +13918,7 @@
 </p:sld>
 </file>
 
-<file path=ppt/slides/slide14.xml><?xml version="1.0" encoding="utf-8"?>
+<file path=ppt/slides/slide15.xml><?xml version="1.0" encoding="utf-8"?>
 <p:sld xmlns:a="http://schemas.openxmlformats.org/drawingml/2006/main" xmlns:r="http://schemas.openxmlformats.org/officeDocument/2006/relationships" xmlns:p="http://schemas.openxmlformats.org/presentationml/2006/main">
   <p:cSld>
     <p:spTree>
@@ -13791,7 +14597,7 @@
 </p:sld>
 </file>
 
-<file path=ppt/slides/slide15.xml><?xml version="1.0" encoding="utf-8"?>
+<file path=ppt/slides/slide16.xml><?xml version="1.0" encoding="utf-8"?>
 <p:sld xmlns:a="http://schemas.openxmlformats.org/drawingml/2006/main" xmlns:r="http://schemas.openxmlformats.org/officeDocument/2006/relationships" xmlns:p="http://schemas.openxmlformats.org/presentationml/2006/main">
   <p:cSld>
     <p:spTree>
@@ -14480,6 +15286,79 @@
   <p:cSld>
     <p:spTree>
       <p:nvGrpSpPr>
+        <p:cNvPr id="1" name=""/>
+        <p:cNvGrpSpPr/>
+        <p:nvPr/>
+      </p:nvGrpSpPr>
+      <p:grpSpPr>
+        <a:xfrm>
+          <a:off x="0" y="0"/>
+          <a:ext cx="0" cy="0"/>
+          <a:chOff x="0" y="0"/>
+          <a:chExt cx="0" cy="0"/>
+        </a:xfrm>
+      </p:grpSpPr>
+      <p:sp>
+        <p:nvSpPr>
+          <p:cNvPr id="2" name="Title 1">
+            <a:extLst>
+              <a:ext uri="{FF2B5EF4-FFF2-40B4-BE49-F238E27FC236}">
+                <a16:creationId xmlns:a16="http://schemas.microsoft.com/office/drawing/2014/main" id="{026EFEA9-68D8-B99F-36D3-E5EAD7221A1F}"/>
+              </a:ext>
+            </a:extLst>
+          </p:cNvPr>
+          <p:cNvSpPr>
+            <a:spLocks noGrp="1"/>
+          </p:cNvSpPr>
+          <p:nvPr>
+            <p:ph type="title"/>
+          </p:nvPr>
+        </p:nvSpPr>
+        <p:spPr>
+          <a:xfrm>
+            <a:off x="1078043" y="3123315"/>
+            <a:ext cx="10515600" cy="1325563"/>
+          </a:xfrm>
+        </p:spPr>
+        <p:txBody>
+          <a:bodyPr/>
+          <a:lstStyle/>
+          <a:p>
+            <a:r>
+              <a:rPr lang="en-US" dirty="0"/>
+              <a:t>Workshop - </a:t>
+            </a:r>
+            <a:r>
+              <a:rPr lang="en-US" dirty="0">
+                <a:hlinkClick r:id="rId2"/>
+              </a:rPr>
+              <a:t>https://tinyurl.com/4fhaeb68</a:t>
+            </a:r>
+            <a:br>
+              <a:rPr lang="en-US" dirty="0"/>
+            </a:br>
+            <a:endParaRPr lang="en-US" dirty="0"/>
+          </a:p>
+        </p:txBody>
+      </p:sp>
+    </p:spTree>
+    <p:extLst>
+      <p:ext uri="{BB962C8B-B14F-4D97-AF65-F5344CB8AC3E}">
+        <p14:creationId xmlns:p14="http://schemas.microsoft.com/office/powerpoint/2010/main" val="2253280120"/>
+      </p:ext>
+    </p:extLst>
+  </p:cSld>
+  <p:clrMapOvr>
+    <a:masterClrMapping/>
+  </p:clrMapOvr>
+</p:sld>
+</file>
+
+<file path=ppt/slides/slide3.xml><?xml version="1.0" encoding="utf-8"?>
+<p:sld xmlns:a="http://schemas.openxmlformats.org/drawingml/2006/main" xmlns:r="http://schemas.openxmlformats.org/officeDocument/2006/relationships" xmlns:p="http://schemas.openxmlformats.org/presentationml/2006/main">
+  <p:cSld>
+    <p:spTree>
+      <p:nvGrpSpPr>
         <p:cNvPr id="1" name="">
           <a:extLst>
             <a:ext uri="{FF2B5EF4-FFF2-40B4-BE49-F238E27FC236}">
@@ -14579,7 +15458,7 @@
 </p:sld>
 </file>
 
-<file path=ppt/slides/slide3.xml><?xml version="1.0" encoding="utf-8"?>
+<file path=ppt/slides/slide4.xml><?xml version="1.0" encoding="utf-8"?>
 <p:sld xmlns:a="http://schemas.openxmlformats.org/drawingml/2006/main" xmlns:r="http://schemas.openxmlformats.org/officeDocument/2006/relationships" xmlns:p="http://schemas.openxmlformats.org/presentationml/2006/main">
   <p:cSld>
     <p:spTree>
@@ -14967,7 +15846,7 @@
 </p:sld>
 </file>
 
-<file path=ppt/slides/slide4.xml><?xml version="1.0" encoding="utf-8"?>
+<file path=ppt/slides/slide5.xml><?xml version="1.0" encoding="utf-8"?>
 <p:sld xmlns:a="http://schemas.openxmlformats.org/drawingml/2006/main" xmlns:r="http://schemas.openxmlformats.org/officeDocument/2006/relationships" xmlns:p="http://schemas.openxmlformats.org/presentationml/2006/main">
   <p:cSld>
     <p:spTree>
@@ -15971,7 +16850,7 @@
 </p:sld>
 </file>
 
-<file path=ppt/slides/slide5.xml><?xml version="1.0" encoding="utf-8"?>
+<file path=ppt/slides/slide6.xml><?xml version="1.0" encoding="utf-8"?>
 <p:sld xmlns:a="http://schemas.openxmlformats.org/drawingml/2006/main" xmlns:r="http://schemas.openxmlformats.org/officeDocument/2006/relationships" xmlns:p="http://schemas.openxmlformats.org/presentationml/2006/main">
   <p:cSld>
     <p:spTree>
@@ -16692,7 +17571,7 @@
 </p:sld>
 </file>
 
-<file path=ppt/slides/slide6.xml><?xml version="1.0" encoding="utf-8"?>
+<file path=ppt/slides/slide7.xml><?xml version="1.0" encoding="utf-8"?>
 <p:sld xmlns:a="http://schemas.openxmlformats.org/drawingml/2006/main" xmlns:r="http://schemas.openxmlformats.org/officeDocument/2006/relationships" xmlns:p="http://schemas.openxmlformats.org/presentationml/2006/main">
   <p:cSld>
     <p:spTree>
@@ -17936,7 +18815,7 @@
 </p:sld>
 </file>
 
-<file path=ppt/slides/slide7.xml><?xml version="1.0" encoding="utf-8"?>
+<file path=ppt/slides/slide8.xml><?xml version="1.0" encoding="utf-8"?>
 <p:sld xmlns:a="http://schemas.openxmlformats.org/drawingml/2006/main" xmlns:r="http://schemas.openxmlformats.org/officeDocument/2006/relationships" xmlns:p="http://schemas.openxmlformats.org/presentationml/2006/main">
   <p:cSld>
     <p:spTree>
@@ -18593,7 +19472,7 @@
 </p:sld>
 </file>
 
-<file path=ppt/slides/slide8.xml><?xml version="1.0" encoding="utf-8"?>
+<file path=ppt/slides/slide9.xml><?xml version="1.0" encoding="utf-8"?>
 <p:sld xmlns:a="http://schemas.openxmlformats.org/drawingml/2006/main" xmlns:r="http://schemas.openxmlformats.org/officeDocument/2006/relationships" xmlns:p="http://schemas.openxmlformats.org/presentationml/2006/main">
   <p:cSld>
     <p:spTree>
@@ -19149,811 +20028,6 @@
                 <a:latin typeface="Montserrat"/>
               </a:rPr>
               <a:t>▸ Test on 5 rows → measure cost → project to 500K rows → decide</a:t>
-            </a:r>
-          </a:p>
-        </p:txBody>
-      </p:sp>
-    </p:spTree>
-  </p:cSld>
-  <p:clrMapOvr>
-    <a:masterClrMapping/>
-  </p:clrMapOvr>
-</p:sld>
-</file>
-
-<file path=ppt/slides/slide9.xml><?xml version="1.0" encoding="utf-8"?>
-<p:sld xmlns:a="http://schemas.openxmlformats.org/drawingml/2006/main" xmlns:r="http://schemas.openxmlformats.org/officeDocument/2006/relationships" xmlns:p="http://schemas.openxmlformats.org/presentationml/2006/main">
-  <p:cSld>
-    <p:spTree>
-      <p:nvGrpSpPr>
-        <p:cNvPr id="1" name=""/>
-        <p:cNvGrpSpPr/>
-        <p:nvPr/>
-      </p:nvGrpSpPr>
-      <p:grpSpPr>
-        <a:xfrm>
-          <a:off x="0" y="0"/>
-          <a:ext cx="0" cy="0"/>
-          <a:chOff x="0" y="0"/>
-          <a:chExt cx="0" cy="0"/>
-        </a:xfrm>
-      </p:grpSpPr>
-      <p:sp>
-        <p:nvSpPr>
-          <p:cNvPr id="2" name="Title 1"/>
-          <p:cNvSpPr>
-            <a:spLocks noGrp="1"/>
-          </p:cNvSpPr>
-          <p:nvPr>
-            <p:ph type="title"/>
-          </p:nvPr>
-        </p:nvSpPr>
-        <p:spPr>
-          <a:xfrm>
-            <a:off x="640080" y="314007"/>
-            <a:ext cx="10515600" cy="735542"/>
-          </a:xfrm>
-        </p:spPr>
-        <p:txBody>
-          <a:bodyPr/>
-          <a:lstStyle/>
-          <a:p>
-            <a:r>
-              <a:rPr sz="2800" b="1" dirty="0">
-                <a:solidFill>
-                  <a:srgbClr val="058DC7"/>
-                </a:solidFill>
-                <a:latin typeface="Montserrat"/>
-              </a:rPr>
-              <a:t>Token &amp; Credit Usage Tracking</a:t>
-            </a:r>
-          </a:p>
-        </p:txBody>
-      </p:sp>
-      <p:sp>
-        <p:nvSpPr>
-          <p:cNvPr id="3" name="TextBox 2"/>
-          <p:cNvSpPr txBox="1"/>
-          <p:nvPr/>
-        </p:nvSpPr>
-        <p:spPr>
-          <a:xfrm>
-            <a:off x="640080" y="1005840"/>
-            <a:ext cx="10515600" cy="307777"/>
-          </a:xfrm>
-          <a:prstGeom prst="rect">
-            <a:avLst/>
-          </a:prstGeom>
-          <a:noFill/>
-        </p:spPr>
-        <p:txBody>
-          <a:bodyPr wrap="square">
-            <a:spAutoFit/>
-          </a:bodyPr>
-          <a:lstStyle/>
-          <a:p>
-            <a:pPr algn="l">
-              <a:defRPr sz="1400" b="0">
-                <a:solidFill>
-                  <a:srgbClr val="666666"/>
-                </a:solidFill>
-                <a:latin typeface="Montserrat"/>
-              </a:defRPr>
-            </a:pPr>
-            <a:r>
-              <a:rPr dirty="0"/>
-              <a:t>Module 06 </a:t>
-            </a:r>
-            <a:r>
-              <a:rPr lang="en-US" dirty="0"/>
-              <a:t>-</a:t>
-            </a:r>
-            <a:r>
-              <a:rPr dirty="0"/>
-              <a:t> Your real-time FinOps console</a:t>
-            </a:r>
-          </a:p>
-        </p:txBody>
-      </p:sp>
-      <p:sp>
-        <p:nvSpPr>
-          <p:cNvPr id="4" name="Rounded Rectangle 3"/>
-          <p:cNvSpPr/>
-          <p:nvPr/>
-        </p:nvSpPr>
-        <p:spPr>
-          <a:xfrm>
-            <a:off x="640080" y="1463040"/>
-            <a:ext cx="5029200" cy="1097280"/>
-          </a:xfrm>
-          <a:prstGeom prst="roundRect">
-            <a:avLst/>
-          </a:prstGeom>
-          <a:solidFill>
-            <a:srgbClr val="F3F3F3"/>
-          </a:solidFill>
-          <a:ln w="12700">
-            <a:solidFill>
-              <a:srgbClr val="DDDDDD"/>
-            </a:solidFill>
-          </a:ln>
-          <a:effectLst/>
-        </p:spPr>
-        <p:style>
-          <a:lnRef idx="1">
-            <a:schemeClr val="accent1"/>
-          </a:lnRef>
-          <a:fillRef idx="3">
-            <a:schemeClr val="accent1"/>
-          </a:fillRef>
-          <a:effectRef idx="2">
-            <a:schemeClr val="accent1"/>
-          </a:effectRef>
-          <a:fontRef idx="minor">
-            <a:schemeClr val="lt1"/>
-          </a:fontRef>
-        </p:style>
-        <p:txBody>
-          <a:bodyPr wrap="square" lIns="137160" tIns="91440" rtlCol="0" anchor="ctr"/>
-          <a:lstStyle/>
-          <a:p>
-            <a:pPr algn="ctr">
-              <a:spcAft>
-                <a:spcPts val="400"/>
-              </a:spcAft>
-            </a:pPr>
-            <a:r>
-              <a:rPr sz="1300" b="1" dirty="0">
-                <a:solidFill>
-                  <a:srgbClr val="058DC7"/>
-                </a:solidFill>
-                <a:latin typeface="Montserrat"/>
-              </a:rPr>
-              <a:t>Q1–Q5: Core Tracking</a:t>
-            </a:r>
-          </a:p>
-          <a:p>
-            <a:pPr>
-              <a:spcBef>
-                <a:spcPts val="100"/>
-              </a:spcBef>
-              <a:spcAft>
-                <a:spcPts val="100"/>
-              </a:spcAft>
-            </a:pPr>
-            <a:r>
-              <a:rPr sz="1200" dirty="0">
-                <a:solidFill>
-                  <a:srgbClr val="333333"/>
-                </a:solidFill>
-                <a:latin typeface="Montserrat"/>
-              </a:rPr>
-              <a:t>▸ AI credits by function, model, hour</a:t>
-            </a:r>
-          </a:p>
-          <a:p>
-            <a:pPr>
-              <a:spcBef>
-                <a:spcPts val="100"/>
-              </a:spcBef>
-              <a:spcAft>
-                <a:spcPts val="100"/>
-              </a:spcAft>
-            </a:pPr>
-            <a:r>
-              <a:rPr sz="1200" dirty="0">
-                <a:solidFill>
-                  <a:srgbClr val="333333"/>
-                </a:solidFill>
-                <a:latin typeface="Montserrat"/>
-              </a:rPr>
-              <a:t>▸ Cost projection from dedicated views</a:t>
-            </a:r>
-          </a:p>
-        </p:txBody>
-      </p:sp>
-      <p:sp>
-        <p:nvSpPr>
-          <p:cNvPr id="5" name="Rounded Rectangle 4"/>
-          <p:cNvSpPr/>
-          <p:nvPr/>
-        </p:nvSpPr>
-        <p:spPr>
-          <a:xfrm>
-            <a:off x="6126480" y="1463040"/>
-            <a:ext cx="5029200" cy="1097280"/>
-          </a:xfrm>
-          <a:prstGeom prst="roundRect">
-            <a:avLst/>
-          </a:prstGeom>
-          <a:solidFill>
-            <a:srgbClr val="F3F3F3"/>
-          </a:solidFill>
-          <a:ln w="12700">
-            <a:solidFill>
-              <a:srgbClr val="DDDDDD"/>
-            </a:solidFill>
-          </a:ln>
-          <a:effectLst/>
-        </p:spPr>
-        <p:style>
-          <a:lnRef idx="1">
-            <a:schemeClr val="accent1"/>
-          </a:lnRef>
-          <a:fillRef idx="3">
-            <a:schemeClr val="accent1"/>
-          </a:fillRef>
-          <a:effectRef idx="2">
-            <a:schemeClr val="accent1"/>
-          </a:effectRef>
-          <a:fontRef idx="minor">
-            <a:schemeClr val="lt1"/>
-          </a:fontRef>
-        </p:style>
-        <p:txBody>
-          <a:bodyPr wrap="square" lIns="137160" tIns="91440" rtlCol="0" anchor="ctr"/>
-          <a:lstStyle/>
-          <a:p>
-            <a:pPr algn="ctr">
-              <a:spcAft>
-                <a:spcPts val="400"/>
-              </a:spcAft>
-            </a:pPr>
-            <a:r>
-              <a:rPr sz="1300" b="1" dirty="0">
-                <a:solidFill>
-                  <a:srgbClr val="058DC7"/>
-                </a:solidFill>
-                <a:latin typeface="Montserrat"/>
-              </a:rPr>
-              <a:t>Q6: Idle Search Detection</a:t>
-            </a:r>
-          </a:p>
-          <a:p>
-            <a:pPr>
-              <a:spcBef>
-                <a:spcPts val="100"/>
-              </a:spcBef>
-              <a:spcAft>
-                <a:spcPts val="100"/>
-              </a:spcAft>
-            </a:pPr>
-            <a:r>
-              <a:rPr sz="1200" dirty="0">
-                <a:solidFill>
-                  <a:srgbClr val="333333"/>
-                </a:solidFill>
-                <a:latin typeface="Montserrat"/>
-              </a:rPr>
-              <a:t>▸ Search indexing with zero queries</a:t>
-            </a:r>
-          </a:p>
-          <a:p>
-            <a:pPr>
-              <a:spcBef>
-                <a:spcPts val="100"/>
-              </a:spcBef>
-              <a:spcAft>
-                <a:spcPts val="100"/>
-              </a:spcAft>
-            </a:pPr>
-            <a:r>
-              <a:rPr sz="1200" dirty="0">
-                <a:solidFill>
-                  <a:srgbClr val="333333"/>
-                </a:solidFill>
-                <a:latin typeface="Montserrat"/>
-              </a:rPr>
-              <a:t>▸ 100% waste (Transition → Module 07)</a:t>
-            </a:r>
-          </a:p>
-        </p:txBody>
-      </p:sp>
-      <p:sp>
-        <p:nvSpPr>
-          <p:cNvPr id="6" name="Rounded Rectangle 5"/>
-          <p:cNvSpPr/>
-          <p:nvPr/>
-        </p:nvSpPr>
-        <p:spPr>
-          <a:xfrm>
-            <a:off x="640080" y="2743200"/>
-            <a:ext cx="5029200" cy="1097280"/>
-          </a:xfrm>
-          <a:prstGeom prst="roundRect">
-            <a:avLst/>
-          </a:prstGeom>
-          <a:solidFill>
-            <a:srgbClr val="F3F3F3"/>
-          </a:solidFill>
-          <a:ln w="25400">
-            <a:solidFill>
-              <a:srgbClr val="CC0000"/>
-            </a:solidFill>
-          </a:ln>
-          <a:effectLst/>
-        </p:spPr>
-        <p:style>
-          <a:lnRef idx="1">
-            <a:schemeClr val="accent1"/>
-          </a:lnRef>
-          <a:fillRef idx="3">
-            <a:schemeClr val="accent1"/>
-          </a:fillRef>
-          <a:effectRef idx="2">
-            <a:schemeClr val="accent1"/>
-          </a:effectRef>
-          <a:fontRef idx="minor">
-            <a:schemeClr val="lt1"/>
-          </a:fontRef>
-        </p:style>
-        <p:txBody>
-          <a:bodyPr wrap="square" lIns="137160" tIns="91440" rtlCol="0" anchor="ctr"/>
-          <a:lstStyle/>
-          <a:p>
-            <a:pPr algn="ctr">
-              <a:spcAft>
-                <a:spcPts val="400"/>
-              </a:spcAft>
-            </a:pPr>
-            <a:r>
-              <a:rPr sz="1300" b="1" dirty="0">
-                <a:solidFill>
-                  <a:srgbClr val="058DC7"/>
-                </a:solidFill>
-                <a:latin typeface="Montserrat"/>
-              </a:rPr>
-              <a:t>Q7: Over-Sized Models</a:t>
-            </a:r>
-          </a:p>
-          <a:p>
-            <a:pPr>
-              <a:spcBef>
-                <a:spcPts val="100"/>
-              </a:spcBef>
-              <a:spcAft>
-                <a:spcPts val="100"/>
-              </a:spcAft>
-            </a:pPr>
-            <a:r>
-              <a:rPr sz="1200" dirty="0">
-                <a:solidFill>
-                  <a:srgbClr val="333333"/>
-                </a:solidFill>
-                <a:latin typeface="Montserrat"/>
-              </a:rPr>
-              <a:t>▸ credits_per_1M_tokens metric</a:t>
-            </a:r>
-          </a:p>
-          <a:p>
-            <a:pPr>
-              <a:spcBef>
-                <a:spcPts val="100"/>
-              </a:spcBef>
-              <a:spcAft>
-                <a:spcPts val="100"/>
-              </a:spcAft>
-            </a:pPr>
-            <a:r>
-              <a:rPr sz="1200" dirty="0">
-                <a:solidFill>
-                  <a:srgbClr val="333333"/>
-                </a:solidFill>
-                <a:latin typeface="Montserrat"/>
-              </a:rPr>
-              <a:t>▸ Find where cheaper models suffice (40–75% savings)</a:t>
-            </a:r>
-          </a:p>
-        </p:txBody>
-      </p:sp>
-      <p:sp>
-        <p:nvSpPr>
-          <p:cNvPr id="7" name="Rounded Rectangle 6"/>
-          <p:cNvSpPr/>
-          <p:nvPr/>
-        </p:nvSpPr>
-        <p:spPr>
-          <a:xfrm>
-            <a:off x="6126480" y="2743200"/>
-            <a:ext cx="5029200" cy="1097280"/>
-          </a:xfrm>
-          <a:prstGeom prst="roundRect">
-            <a:avLst/>
-          </a:prstGeom>
-          <a:solidFill>
-            <a:srgbClr val="F3F3F3"/>
-          </a:solidFill>
-          <a:ln w="25400">
-            <a:solidFill>
-              <a:srgbClr val="CC0000"/>
-            </a:solidFill>
-          </a:ln>
-          <a:effectLst/>
-        </p:spPr>
-        <p:style>
-          <a:lnRef idx="1">
-            <a:schemeClr val="accent1"/>
-          </a:lnRef>
-          <a:fillRef idx="3">
-            <a:schemeClr val="accent1"/>
-          </a:fillRef>
-          <a:effectRef idx="2">
-            <a:schemeClr val="accent1"/>
-          </a:effectRef>
-          <a:fontRef idx="minor">
-            <a:schemeClr val="lt1"/>
-          </a:fontRef>
-        </p:style>
-        <p:txBody>
-          <a:bodyPr wrap="square" lIns="137160" tIns="91440" rtlCol="0" anchor="ctr"/>
-          <a:lstStyle/>
-          <a:p>
-            <a:pPr algn="ctr">
-              <a:spcAft>
-                <a:spcPts val="400"/>
-              </a:spcAft>
-            </a:pPr>
-            <a:r>
-              <a:rPr sz="1300" b="1" dirty="0">
-                <a:solidFill>
-                  <a:srgbClr val="058DC7"/>
-                </a:solidFill>
-                <a:latin typeface="Montserrat"/>
-              </a:rPr>
-              <a:t>Q8–Q9: Redundant Calls &amp; Prompt Bloat</a:t>
-            </a:r>
-          </a:p>
-          <a:p>
-            <a:pPr>
-              <a:spcBef>
-                <a:spcPts val="100"/>
-              </a:spcBef>
-              <a:spcAft>
-                <a:spcPts val="100"/>
-              </a:spcAft>
-            </a:pPr>
-            <a:r>
-              <a:rPr sz="1200" dirty="0">
-                <a:solidFill>
-                  <a:srgbClr val="333333"/>
-                </a:solidFill>
-                <a:latin typeface="Montserrat"/>
-              </a:rPr>
-              <a:t>▸ Duplicate pipelines detected</a:t>
-            </a:r>
-          </a:p>
-          <a:p>
-            <a:pPr>
-              <a:spcBef>
-                <a:spcPts val="100"/>
-              </a:spcBef>
-              <a:spcAft>
-                <a:spcPts val="100"/>
-              </a:spcAft>
-            </a:pPr>
-            <a:r>
-              <a:rPr sz="1200" dirty="0">
-                <a:solidFill>
-                  <a:srgbClr val="333333"/>
-                </a:solidFill>
-                <a:latin typeface="Montserrat"/>
-              </a:rPr>
-              <a:t>▸ Rising avg tokens/call over time</a:t>
-            </a:r>
-          </a:p>
-        </p:txBody>
-      </p:sp>
-      <p:sp>
-        <p:nvSpPr>
-          <p:cNvPr id="8" name="Rounded Rectangle 7"/>
-          <p:cNvSpPr/>
-          <p:nvPr/>
-        </p:nvSpPr>
-        <p:spPr>
-          <a:xfrm>
-            <a:off x="640080" y="4023360"/>
-            <a:ext cx="5029200" cy="1097280"/>
-          </a:xfrm>
-          <a:prstGeom prst="roundRect">
-            <a:avLst/>
-          </a:prstGeom>
-          <a:solidFill>
-            <a:srgbClr val="F3F3F3"/>
-          </a:solidFill>
-          <a:ln w="25400">
-            <a:solidFill>
-              <a:srgbClr val="CC0000"/>
-            </a:solidFill>
-          </a:ln>
-          <a:effectLst/>
-        </p:spPr>
-        <p:style>
-          <a:lnRef idx="1">
-            <a:schemeClr val="accent1"/>
-          </a:lnRef>
-          <a:fillRef idx="3">
-            <a:schemeClr val="accent1"/>
-          </a:fillRef>
-          <a:effectRef idx="2">
-            <a:schemeClr val="accent1"/>
-          </a:effectRef>
-          <a:fontRef idx="minor">
-            <a:schemeClr val="lt1"/>
-          </a:fontRef>
-        </p:style>
-        <p:txBody>
-          <a:bodyPr wrap="square" lIns="137160" tIns="91440" rtlCol="0" anchor="ctr"/>
-          <a:lstStyle/>
-          <a:p>
-            <a:pPr algn="ctr">
-              <a:spcAft>
-                <a:spcPts val="400"/>
-              </a:spcAft>
-            </a:pPr>
-            <a:r>
-              <a:rPr sz="1300" b="1" dirty="0">
-                <a:solidFill>
-                  <a:srgbClr val="058DC7"/>
-                </a:solidFill>
-                <a:latin typeface="Montserrat"/>
-              </a:rPr>
-              <a:t>Q10–Q11: Agent Loops &amp; Dev in Prod</a:t>
-            </a:r>
-          </a:p>
-          <a:p>
-            <a:pPr>
-              <a:spcBef>
-                <a:spcPts val="100"/>
-              </a:spcBef>
-              <a:spcAft>
-                <a:spcPts val="100"/>
-              </a:spcAft>
-            </a:pPr>
-            <a:r>
-              <a:rPr sz="1200" dirty="0">
-                <a:solidFill>
-                  <a:srgbClr val="333333"/>
-                </a:solidFill>
-                <a:latin typeface="Montserrat"/>
-              </a:rPr>
-              <a:t>▸ MAX vs AVG credit gap</a:t>
-            </a:r>
-          </a:p>
-          <a:p>
-            <a:pPr>
-              <a:spcBef>
-                <a:spcPts val="100"/>
-              </a:spcBef>
-              <a:spcAft>
-                <a:spcPts val="100"/>
-              </a:spcAft>
-            </a:pPr>
-            <a:r>
-              <a:rPr sz="1200" dirty="0">
-                <a:solidFill>
-                  <a:srgbClr val="333333"/>
-                </a:solidFill>
-                <a:latin typeface="Montserrat"/>
-              </a:rPr>
-              <a:t>▸ LATERAL FLATTEN(ROLE_NAMES)</a:t>
-            </a:r>
-          </a:p>
-        </p:txBody>
-      </p:sp>
-      <p:sp>
-        <p:nvSpPr>
-          <p:cNvPr id="9" name="Rounded Rectangle 8"/>
-          <p:cNvSpPr/>
-          <p:nvPr/>
-        </p:nvSpPr>
-        <p:spPr>
-          <a:xfrm>
-            <a:off x="6126480" y="4023360"/>
-            <a:ext cx="5029200" cy="1097280"/>
-          </a:xfrm>
-          <a:prstGeom prst="roundRect">
-            <a:avLst/>
-          </a:prstGeom>
-          <a:solidFill>
-            <a:srgbClr val="F3F3F3"/>
-          </a:solidFill>
-          <a:ln w="25400">
-            <a:solidFill>
-              <a:srgbClr val="CC0000"/>
-            </a:solidFill>
-          </a:ln>
-          <a:effectLst/>
-        </p:spPr>
-        <p:style>
-          <a:lnRef idx="1">
-            <a:schemeClr val="accent1"/>
-          </a:lnRef>
-          <a:fillRef idx="3">
-            <a:schemeClr val="accent1"/>
-          </a:fillRef>
-          <a:effectRef idx="2">
-            <a:schemeClr val="accent1"/>
-          </a:effectRef>
-          <a:fontRef idx="minor">
-            <a:schemeClr val="lt1"/>
-          </a:fontRef>
-        </p:style>
-        <p:txBody>
-          <a:bodyPr wrap="square" lIns="137160" tIns="91440" rtlCol="0" anchor="ctr"/>
-          <a:lstStyle/>
-          <a:p>
-            <a:pPr algn="ctr">
-              <a:spcAft>
-                <a:spcPts val="400"/>
-              </a:spcAft>
-            </a:pPr>
-            <a:r>
-              <a:rPr sz="1300" b="1" dirty="0">
-                <a:solidFill>
-                  <a:srgbClr val="058DC7"/>
-                </a:solidFill>
-                <a:latin typeface="Montserrat"/>
-              </a:rPr>
-              <a:t>Q12–Q13: Anomaly &amp; Attribution</a:t>
-            </a:r>
-          </a:p>
-          <a:p>
-            <a:pPr>
-              <a:spcBef>
-                <a:spcPts val="100"/>
-              </a:spcBef>
-              <a:spcAft>
-                <a:spcPts val="100"/>
-              </a:spcAft>
-            </a:pPr>
-            <a:r>
-              <a:rPr sz="1200" dirty="0">
-                <a:solidFill>
-                  <a:srgbClr val="333333"/>
-                </a:solidFill>
-                <a:latin typeface="Montserrat"/>
-              </a:rPr>
-              <a:t>▸ WoW LAG(7) spike detection</a:t>
-            </a:r>
-          </a:p>
-          <a:p>
-            <a:pPr>
-              <a:spcBef>
-                <a:spcPts val="100"/>
-              </a:spcBef>
-              <a:spcAft>
-                <a:spcPts val="100"/>
-              </a:spcAft>
-            </a:pPr>
-            <a:r>
-              <a:rPr sz="1200" dirty="0">
-                <a:solidFill>
-                  <a:srgbClr val="333333"/>
-                </a:solidFill>
-                <a:latin typeface="Montserrat"/>
-              </a:rPr>
-              <a:t>▸ Tagged vs untagged spend ratio</a:t>
-            </a:r>
-          </a:p>
-        </p:txBody>
-      </p:sp>
-      <p:sp>
-        <p:nvSpPr>
-          <p:cNvPr id="11" name="TextBox 10"/>
-          <p:cNvSpPr txBox="1"/>
-          <p:nvPr/>
-        </p:nvSpPr>
-        <p:spPr>
-          <a:xfrm>
-            <a:off x="9601200" y="6400800"/>
-            <a:ext cx="2286000" cy="320040"/>
-          </a:xfrm>
-          <a:prstGeom prst="rect">
-            <a:avLst/>
-          </a:prstGeom>
-          <a:noFill/>
-        </p:spPr>
-        <p:txBody>
-          <a:bodyPr wrap="square">
-            <a:spAutoFit/>
-          </a:bodyPr>
-          <a:lstStyle/>
-          <a:p>
-            <a:pPr algn="r">
-              <a:defRPr sz="1000" b="1">
-                <a:solidFill>
-                  <a:srgbClr val="666666"/>
-                </a:solidFill>
-                <a:latin typeface="Montserrat"/>
-              </a:defRPr>
-            </a:pPr>
-            <a:r>
-              <a:t>#DevOpsDays</a:t>
-            </a:r>
-          </a:p>
-        </p:txBody>
-      </p:sp>
-      <p:sp>
-        <p:nvSpPr>
-          <p:cNvPr id="12" name="Rounded Rectangle 11">
-            <a:extLst>
-              <a:ext uri="{FF2B5EF4-FFF2-40B4-BE49-F238E27FC236}">
-                <a16:creationId xmlns:a16="http://schemas.microsoft.com/office/drawing/2014/main" id="{B77A33F7-53F7-125D-4B70-7492B6EC7DBB}"/>
-              </a:ext>
-            </a:extLst>
-          </p:cNvPr>
-          <p:cNvSpPr/>
-          <p:nvPr/>
-        </p:nvSpPr>
-        <p:spPr>
-          <a:xfrm>
-            <a:off x="1500985" y="5296411"/>
-            <a:ext cx="8983133" cy="928617"/>
-          </a:xfrm>
-          <a:prstGeom prst="roundRect">
-            <a:avLst/>
-          </a:prstGeom>
-          <a:solidFill>
-            <a:srgbClr val="069ED8"/>
-          </a:solidFill>
-          <a:ln w="12700">
-            <a:solidFill>
-              <a:srgbClr val="FFFFFF"/>
-            </a:solidFill>
-          </a:ln>
-          <a:effectLst/>
-        </p:spPr>
-        <p:style>
-          <a:lnRef idx="1">
-            <a:schemeClr val="accent1"/>
-          </a:lnRef>
-          <a:fillRef idx="3">
-            <a:schemeClr val="accent1"/>
-          </a:fillRef>
-          <a:effectRef idx="2">
-            <a:schemeClr val="accent1"/>
-          </a:effectRef>
-          <a:fontRef idx="minor">
-            <a:schemeClr val="lt1"/>
-          </a:fontRef>
-        </p:style>
-        <p:txBody>
-          <a:bodyPr wrap="square" rtlCol="0" anchor="ctr"/>
-          <a:lstStyle/>
-          <a:p>
-            <a:pPr marL="171450" indent="-171450">
-              <a:spcBef>
-                <a:spcPts val="600"/>
-              </a:spcBef>
-              <a:buFont typeface="Arial" panose="020B0604020202020204" pitchFamily="34" charset="0"/>
-              <a:buChar char="•"/>
-            </a:pPr>
-            <a:r>
-              <a:rPr lang="en-US" dirty="0">
-                <a:solidFill>
-                  <a:schemeClr val="tx1"/>
-                </a:solidFill>
-                <a:latin typeface="Montserrat"/>
-              </a:rPr>
-              <a:t>Shadow Waste: Detect patterns of hidden AI credit drain. </a:t>
-            </a:r>
-          </a:p>
-          <a:p>
-            <a:pPr marL="171450" indent="-171450">
-              <a:spcBef>
-                <a:spcPts val="600"/>
-              </a:spcBef>
-              <a:buFont typeface="Arial" panose="020B0604020202020204" pitchFamily="34" charset="0"/>
-              <a:buChar char="•"/>
-            </a:pPr>
-            <a:r>
-              <a:rPr lang="en-US" dirty="0">
-                <a:solidFill>
-                  <a:schemeClr val="tx1"/>
-                </a:solidFill>
-                <a:latin typeface="Montserrat"/>
-              </a:rPr>
-              <a:t>AI services are serverless - no warehouse to watch, no query fails. Credits silently accumulate.</a:t>
             </a:r>
           </a:p>
         </p:txBody>

--- a/presentation/Snowflake AI for FinOps—Devopsdays-05012026.pptx
+++ b/presentation/Snowflake AI for FinOps—Devopsdays-05012026.pptx
@@ -5,35 +5,36 @@
     <p:sldMasterId id="2147483648" r:id="rId1"/>
   </p:sldMasterIdLst>
   <p:notesMasterIdLst>
-    <p:notesMasterId r:id="rId18"/>
+    <p:notesMasterId r:id="rId19"/>
   </p:notesMasterIdLst>
   <p:sldIdLst>
     <p:sldId id="256" r:id="rId2"/>
-    <p:sldId id="273" r:id="rId3"/>
-    <p:sldId id="272" r:id="rId4"/>
-    <p:sldId id="258" r:id="rId5"/>
-    <p:sldId id="261" r:id="rId6"/>
-    <p:sldId id="259" r:id="rId7"/>
-    <p:sldId id="260" r:id="rId8"/>
-    <p:sldId id="262" r:id="rId9"/>
-    <p:sldId id="263" r:id="rId10"/>
-    <p:sldId id="264" r:id="rId11"/>
-    <p:sldId id="265" r:id="rId12"/>
-    <p:sldId id="266" r:id="rId13"/>
-    <p:sldId id="271" r:id="rId14"/>
-    <p:sldId id="267" r:id="rId15"/>
-    <p:sldId id="268" r:id="rId16"/>
-    <p:sldId id="270" r:id="rId17"/>
+    <p:sldId id="274" r:id="rId3"/>
+    <p:sldId id="273" r:id="rId4"/>
+    <p:sldId id="272" r:id="rId5"/>
+    <p:sldId id="258" r:id="rId6"/>
+    <p:sldId id="261" r:id="rId7"/>
+    <p:sldId id="259" r:id="rId8"/>
+    <p:sldId id="260" r:id="rId9"/>
+    <p:sldId id="262" r:id="rId10"/>
+    <p:sldId id="263" r:id="rId11"/>
+    <p:sldId id="264" r:id="rId12"/>
+    <p:sldId id="265" r:id="rId13"/>
+    <p:sldId id="266" r:id="rId14"/>
+    <p:sldId id="271" r:id="rId15"/>
+    <p:sldId id="267" r:id="rId16"/>
+    <p:sldId id="268" r:id="rId17"/>
+    <p:sldId id="270" r:id="rId18"/>
   </p:sldIdLst>
   <p:sldSz cx="12192000" cy="6858000"/>
   <p:notesSz cx="6858000" cy="9144000"/>
   <p:embeddedFontLst>
     <p:embeddedFont>
       <p:font typeface="Montserrat" panose="00000500000000000000" pitchFamily="2" charset="0"/>
-      <p:regular r:id="rId19"/>
-      <p:bold r:id="rId20"/>
-      <p:italic r:id="rId21"/>
-      <p:boldItalic r:id="rId22"/>
+      <p:regular r:id="rId20"/>
+      <p:bold r:id="rId21"/>
+      <p:italic r:id="rId22"/>
+      <p:boldItalic r:id="rId23"/>
     </p:embeddedFont>
   </p:embeddedFontLst>
   <p:defaultTextStyle>
@@ -270,7 +271,7 @@
       <p15:sldGuideLst xmlns:p15="http://schemas.microsoft.com/office/powerpoint/2012/main"/>
     </p:ext>
     <p:ext uri="GoogleSlidesCustomDataVersion2">
-      <go:slidesCustomData xmlns="" xmlns:mc="http://schemas.openxmlformats.org/markup-compatibility/2006" xmlns:mv="urn:schemas-microsoft-com:mac:vml" xmlns:c="http://schemas.openxmlformats.org/drawingml/2006/chart" xmlns:dgm="http://schemas.openxmlformats.org/drawingml/2006/diagram" xmlns:o="urn:schemas-microsoft-com:office:office" xmlns:v="urn:schemas-microsoft-com:vml" xmlns:pvml="urn:schemas-microsoft-com:office:powerpoint" xmlns:com="http://schemas.openxmlformats.org/drawingml/2006/compatibility" xmlns:p14="http://schemas.microsoft.com/office/powerpoint/2010/main" xmlns:p15="http://schemas.microsoft.com/office/powerpoint/2012/main" xmlns:ahyp="http://schemas.microsoft.com/office/drawing/2018/hyperlinkcolor" xmlns:go="http://customooxmlschemas.google.com/" r:id="rId23" roundtripDataSignature="AMtx7mgXJgl4xqdZDSxoo+rh88zjTHGBHw=="/>
+      <go:slidesCustomData xmlns:go="http://customooxmlschemas.google.com/" xmlns:ahyp="http://schemas.microsoft.com/office/drawing/2018/hyperlinkcolor" xmlns:p15="http://schemas.microsoft.com/office/powerpoint/2012/main" xmlns:p14="http://schemas.microsoft.com/office/powerpoint/2010/main" xmlns:com="http://schemas.openxmlformats.org/drawingml/2006/compatibility" xmlns:pvml="urn:schemas-microsoft-com:office:powerpoint" xmlns:v="urn:schemas-microsoft-com:vml" xmlns:o="urn:schemas-microsoft-com:office:office" xmlns:dgm="http://schemas.openxmlformats.org/drawingml/2006/diagram" xmlns:c="http://schemas.openxmlformats.org/drawingml/2006/chart" xmlns:mv="urn:schemas-microsoft-com:mac:vml" xmlns:mc="http://schemas.openxmlformats.org/markup-compatibility/2006" xmlns="" r:id="rId24" roundtripDataSignature="AMtx7mgXJgl4xqdZDSxoo+rh88zjTHGBHw=="/>
     </p:ext>
   </p:extLst>
 </p:presentation>
@@ -10771,7 +10772,7 @@
           <a:p>
             <a:r>
               <a:rPr lang="en-US" sz="4800" b="1" dirty="0"/>
-              <a:t>FinOps for Snowflake Cortex (AI)</a:t>
+              <a:t>FinOps for Snowflake AI</a:t>
             </a:r>
             <a:endParaRPr sz="4800" b="1" dirty="0">
               <a:solidFill>
@@ -10960,6 +10961,574 @@
 </file>
 
 <file path=ppt/slides/slide10.xml><?xml version="1.0" encoding="utf-8"?>
+<p:sld xmlns:a="http://schemas.openxmlformats.org/drawingml/2006/main" xmlns:r="http://schemas.openxmlformats.org/officeDocument/2006/relationships" xmlns:p="http://schemas.openxmlformats.org/presentationml/2006/main">
+  <p:cSld>
+    <p:spTree>
+      <p:nvGrpSpPr>
+        <p:cNvPr id="1" name=""/>
+        <p:cNvGrpSpPr/>
+        <p:nvPr/>
+      </p:nvGrpSpPr>
+      <p:grpSpPr>
+        <a:xfrm>
+          <a:off x="0" y="0"/>
+          <a:ext cx="0" cy="0"/>
+          <a:chOff x="0" y="0"/>
+          <a:chExt cx="0" cy="0"/>
+        </a:xfrm>
+      </p:grpSpPr>
+      <p:sp>
+        <p:nvSpPr>
+          <p:cNvPr id="2" name="Title 1"/>
+          <p:cNvSpPr>
+            <a:spLocks noGrp="1"/>
+          </p:cNvSpPr>
+          <p:nvPr>
+            <p:ph type="title"/>
+          </p:nvPr>
+        </p:nvSpPr>
+        <p:spPr>
+          <a:xfrm>
+            <a:off x="640080" y="339408"/>
+            <a:ext cx="10515600" cy="718608"/>
+          </a:xfrm>
+        </p:spPr>
+        <p:txBody>
+          <a:bodyPr/>
+          <a:lstStyle/>
+          <a:p>
+            <a:r>
+              <a:rPr sz="2800" b="1" dirty="0">
+                <a:solidFill>
+                  <a:srgbClr val="058DC7"/>
+                </a:solidFill>
+                <a:latin typeface="Montserrat"/>
+              </a:rPr>
+              <a:t>AI SQL Hands-On Exercises</a:t>
+            </a:r>
+          </a:p>
+        </p:txBody>
+      </p:sp>
+      <p:sp>
+        <p:nvSpPr>
+          <p:cNvPr id="3" name="TextBox 2"/>
+          <p:cNvSpPr txBox="1"/>
+          <p:nvPr/>
+        </p:nvSpPr>
+        <p:spPr>
+          <a:xfrm>
+            <a:off x="640080" y="1005840"/>
+            <a:ext cx="10515600" cy="307777"/>
+          </a:xfrm>
+          <a:prstGeom prst="rect">
+            <a:avLst/>
+          </a:prstGeom>
+          <a:noFill/>
+        </p:spPr>
+        <p:txBody>
+          <a:bodyPr wrap="square">
+            <a:spAutoFit/>
+          </a:bodyPr>
+          <a:lstStyle/>
+          <a:p>
+            <a:pPr algn="l">
+              <a:defRPr sz="1400" b="0">
+                <a:solidFill>
+                  <a:srgbClr val="666666"/>
+                </a:solidFill>
+                <a:latin typeface="Montserrat"/>
+              </a:defRPr>
+            </a:pPr>
+            <a:r>
+              <a:rPr dirty="0"/>
+              <a:t>Module 05 </a:t>
+            </a:r>
+            <a:r>
+              <a:rPr lang="en-US" dirty="0"/>
+              <a:t>-</a:t>
+            </a:r>
+            <a:r>
+              <a:rPr dirty="0"/>
+              <a:t> Run Cortex functions and compare costs</a:t>
+            </a:r>
+          </a:p>
+        </p:txBody>
+      </p:sp>
+      <p:sp>
+        <p:nvSpPr>
+          <p:cNvPr id="4" name="Rounded Rectangle 3"/>
+          <p:cNvSpPr/>
+          <p:nvPr/>
+        </p:nvSpPr>
+        <p:spPr>
+          <a:xfrm>
+            <a:off x="640080" y="1463040"/>
+            <a:ext cx="5029200" cy="1371600"/>
+          </a:xfrm>
+          <a:prstGeom prst="roundRect">
+            <a:avLst/>
+          </a:prstGeom>
+          <a:solidFill>
+            <a:srgbClr val="F3F3F3"/>
+          </a:solidFill>
+          <a:ln w="12700">
+            <a:solidFill>
+              <a:srgbClr val="DDDDDD"/>
+            </a:solidFill>
+          </a:ln>
+          <a:effectLst/>
+        </p:spPr>
+        <p:style>
+          <a:lnRef idx="1">
+            <a:schemeClr val="accent1"/>
+          </a:lnRef>
+          <a:fillRef idx="3">
+            <a:schemeClr val="accent1"/>
+          </a:fillRef>
+          <a:effectRef idx="2">
+            <a:schemeClr val="accent1"/>
+          </a:effectRef>
+          <a:fontRef idx="minor">
+            <a:schemeClr val="lt1"/>
+          </a:fontRef>
+        </p:style>
+        <p:txBody>
+          <a:bodyPr wrap="square" lIns="137160" tIns="91440" rtlCol="0" anchor="ctr"/>
+          <a:lstStyle/>
+          <a:p>
+            <a:pPr algn="ctr">
+              <a:spcAft>
+                <a:spcPts val="400"/>
+              </a:spcAft>
+            </a:pPr>
+            <a:r>
+              <a:rPr sz="1300" b="1" dirty="0">
+                <a:solidFill>
+                  <a:srgbClr val="058DC7"/>
+                </a:solidFill>
+                <a:latin typeface="Montserrat"/>
+              </a:rPr>
+              <a:t>Ex 1: SENTIMENT()</a:t>
+            </a:r>
+          </a:p>
+          <a:p>
+            <a:pPr>
+              <a:spcBef>
+                <a:spcPts val="100"/>
+              </a:spcBef>
+              <a:spcAft>
+                <a:spcPts val="100"/>
+              </a:spcAft>
+            </a:pPr>
+            <a:r>
+              <a:rPr dirty="0">
+                <a:solidFill>
+                  <a:srgbClr val="333333"/>
+                </a:solidFill>
+                <a:latin typeface="Montserrat"/>
+              </a:rPr>
+              <a:t>▸ Analyze customer feedback sentiment</a:t>
+            </a:r>
+          </a:p>
+          <a:p>
+            <a:pPr>
+              <a:spcBef>
+                <a:spcPts val="100"/>
+              </a:spcBef>
+              <a:spcAft>
+                <a:spcPts val="100"/>
+              </a:spcAft>
+            </a:pPr>
+            <a:r>
+              <a:rPr dirty="0">
+                <a:solidFill>
+                  <a:srgbClr val="333333"/>
+                </a:solidFill>
+                <a:latin typeface="Montserrat"/>
+              </a:rPr>
+              <a:t>▸ No model param needed</a:t>
+            </a:r>
+          </a:p>
+        </p:txBody>
+      </p:sp>
+      <p:sp>
+        <p:nvSpPr>
+          <p:cNvPr id="5" name="Rounded Rectangle 4"/>
+          <p:cNvSpPr/>
+          <p:nvPr/>
+        </p:nvSpPr>
+        <p:spPr>
+          <a:xfrm>
+            <a:off x="6126480" y="1463040"/>
+            <a:ext cx="5029200" cy="1371600"/>
+          </a:xfrm>
+          <a:prstGeom prst="roundRect">
+            <a:avLst/>
+          </a:prstGeom>
+          <a:solidFill>
+            <a:srgbClr val="F3F3F3"/>
+          </a:solidFill>
+          <a:ln w="12700">
+            <a:solidFill>
+              <a:srgbClr val="DDDDDD"/>
+            </a:solidFill>
+          </a:ln>
+          <a:effectLst/>
+        </p:spPr>
+        <p:style>
+          <a:lnRef idx="1">
+            <a:schemeClr val="accent1"/>
+          </a:lnRef>
+          <a:fillRef idx="3">
+            <a:schemeClr val="accent1"/>
+          </a:fillRef>
+          <a:effectRef idx="2">
+            <a:schemeClr val="accent1"/>
+          </a:effectRef>
+          <a:fontRef idx="minor">
+            <a:schemeClr val="lt1"/>
+          </a:fontRef>
+        </p:style>
+        <p:txBody>
+          <a:bodyPr wrap="square" lIns="137160" tIns="91440" rtlCol="0" anchor="ctr"/>
+          <a:lstStyle/>
+          <a:p>
+            <a:pPr algn="ctr">
+              <a:spcAft>
+                <a:spcPts val="400"/>
+              </a:spcAft>
+            </a:pPr>
+            <a:r>
+              <a:rPr sz="1300" b="1" dirty="0">
+                <a:solidFill>
+                  <a:srgbClr val="058DC7"/>
+                </a:solidFill>
+                <a:latin typeface="Montserrat"/>
+              </a:rPr>
+              <a:t>Ex 2: CLASSIFY_TEXT()</a:t>
+            </a:r>
+          </a:p>
+          <a:p>
+            <a:pPr>
+              <a:spcBef>
+                <a:spcPts val="100"/>
+              </a:spcBef>
+              <a:spcAft>
+                <a:spcPts val="100"/>
+              </a:spcAft>
+            </a:pPr>
+            <a:r>
+              <a:rPr dirty="0">
+                <a:solidFill>
+                  <a:srgbClr val="333333"/>
+                </a:solidFill>
+                <a:latin typeface="Montserrat"/>
+              </a:rPr>
+              <a:t>▸ Route feedback to support teams</a:t>
+            </a:r>
+          </a:p>
+          <a:p>
+            <a:pPr>
+              <a:spcBef>
+                <a:spcPts val="100"/>
+              </a:spcBef>
+              <a:spcAft>
+                <a:spcPts val="100"/>
+              </a:spcAft>
+            </a:pPr>
+            <a:r>
+              <a:rPr dirty="0">
+                <a:solidFill>
+                  <a:srgbClr val="333333"/>
+                </a:solidFill>
+                <a:latin typeface="Montserrat"/>
+              </a:rPr>
+              <a:t>▸ Zero-shot classification</a:t>
+            </a:r>
+          </a:p>
+        </p:txBody>
+      </p:sp>
+      <p:sp>
+        <p:nvSpPr>
+          <p:cNvPr id="6" name="Rounded Rectangle 5"/>
+          <p:cNvSpPr/>
+          <p:nvPr/>
+        </p:nvSpPr>
+        <p:spPr>
+          <a:xfrm>
+            <a:off x="640080" y="3108960"/>
+            <a:ext cx="5029200" cy="1371600"/>
+          </a:xfrm>
+          <a:prstGeom prst="roundRect">
+            <a:avLst/>
+          </a:prstGeom>
+          <a:solidFill>
+            <a:srgbClr val="F3F3F3"/>
+          </a:solidFill>
+          <a:ln w="12700">
+            <a:solidFill>
+              <a:srgbClr val="DDDDDD"/>
+            </a:solidFill>
+          </a:ln>
+          <a:effectLst/>
+        </p:spPr>
+        <p:style>
+          <a:lnRef idx="1">
+            <a:schemeClr val="accent1"/>
+          </a:lnRef>
+          <a:fillRef idx="3">
+            <a:schemeClr val="accent1"/>
+          </a:fillRef>
+          <a:effectRef idx="2">
+            <a:schemeClr val="accent1"/>
+          </a:effectRef>
+          <a:fontRef idx="minor">
+            <a:schemeClr val="lt1"/>
+          </a:fontRef>
+        </p:style>
+        <p:txBody>
+          <a:bodyPr wrap="square" lIns="137160" tIns="91440" rtlCol="0" anchor="ctr"/>
+          <a:lstStyle/>
+          <a:p>
+            <a:pPr algn="ctr">
+              <a:spcAft>
+                <a:spcPts val="400"/>
+              </a:spcAft>
+            </a:pPr>
+            <a:r>
+              <a:rPr sz="1300" b="1" dirty="0">
+                <a:solidFill>
+                  <a:srgbClr val="058DC7"/>
+                </a:solidFill>
+                <a:latin typeface="Montserrat"/>
+              </a:rPr>
+              <a:t>Ex 3: COMPLETE()</a:t>
+            </a:r>
+          </a:p>
+          <a:p>
+            <a:pPr>
+              <a:spcBef>
+                <a:spcPts val="100"/>
+              </a:spcBef>
+              <a:spcAft>
+                <a:spcPts val="100"/>
+              </a:spcAft>
+            </a:pPr>
+            <a:r>
+              <a:rPr dirty="0">
+                <a:solidFill>
+                  <a:srgbClr val="333333"/>
+                </a:solidFill>
+                <a:latin typeface="Montserrat"/>
+              </a:rPr>
+              <a:t>▸ Extract structured info from text</a:t>
+            </a:r>
+          </a:p>
+          <a:p>
+            <a:pPr>
+              <a:spcBef>
+                <a:spcPts val="100"/>
+              </a:spcBef>
+              <a:spcAft>
+                <a:spcPts val="100"/>
+              </a:spcAft>
+            </a:pPr>
+            <a:r>
+              <a:rPr dirty="0">
+                <a:solidFill>
+                  <a:srgbClr val="333333"/>
+                </a:solidFill>
+                <a:latin typeface="Montserrat"/>
+              </a:rPr>
+              <a:t>▸ Using budget model mistral-7b</a:t>
+            </a:r>
+          </a:p>
+        </p:txBody>
+      </p:sp>
+      <p:sp>
+        <p:nvSpPr>
+          <p:cNvPr id="7" name="Rounded Rectangle 6"/>
+          <p:cNvSpPr/>
+          <p:nvPr/>
+        </p:nvSpPr>
+        <p:spPr>
+          <a:xfrm>
+            <a:off x="6126480" y="3108960"/>
+            <a:ext cx="5029200" cy="1371600"/>
+          </a:xfrm>
+          <a:prstGeom prst="roundRect">
+            <a:avLst/>
+          </a:prstGeom>
+          <a:solidFill>
+            <a:srgbClr val="F3F3F3"/>
+          </a:solidFill>
+          <a:ln w="25400">
+            <a:solidFill>
+              <a:srgbClr val="CC0000"/>
+            </a:solidFill>
+          </a:ln>
+          <a:effectLst/>
+        </p:spPr>
+        <p:style>
+          <a:lnRef idx="1">
+            <a:schemeClr val="accent1"/>
+          </a:lnRef>
+          <a:fillRef idx="3">
+            <a:schemeClr val="accent1"/>
+          </a:fillRef>
+          <a:effectRef idx="2">
+            <a:schemeClr val="accent1"/>
+          </a:effectRef>
+          <a:fontRef idx="minor">
+            <a:schemeClr val="lt1"/>
+          </a:fontRef>
+        </p:style>
+        <p:txBody>
+          <a:bodyPr wrap="square" lIns="137160" tIns="91440" rtlCol="0" anchor="ctr"/>
+          <a:lstStyle/>
+          <a:p>
+            <a:pPr algn="ctr">
+              <a:spcAft>
+                <a:spcPts val="400"/>
+              </a:spcAft>
+            </a:pPr>
+            <a:r>
+              <a:rPr sz="1300" b="1" dirty="0">
+                <a:solidFill>
+                  <a:srgbClr val="CC0000"/>
+                </a:solidFill>
+                <a:latin typeface="Montserrat"/>
+              </a:rPr>
+              <a:t>Ex 4: Model Cost Comparison</a:t>
+            </a:r>
+          </a:p>
+          <a:p>
+            <a:pPr>
+              <a:spcBef>
+                <a:spcPts val="100"/>
+              </a:spcBef>
+              <a:spcAft>
+                <a:spcPts val="100"/>
+              </a:spcAft>
+            </a:pPr>
+            <a:r>
+              <a:rPr dirty="0">
+                <a:solidFill>
+                  <a:srgbClr val="333333"/>
+                </a:solidFill>
+                <a:latin typeface="Montserrat"/>
+              </a:rPr>
+              <a:t>▸ Same prompt, 3 models:</a:t>
+            </a:r>
+          </a:p>
+          <a:p>
+            <a:pPr>
+              <a:spcBef>
+                <a:spcPts val="100"/>
+              </a:spcBef>
+              <a:spcAft>
+                <a:spcPts val="100"/>
+              </a:spcAft>
+            </a:pPr>
+            <a:r>
+              <a:rPr dirty="0">
+                <a:solidFill>
+                  <a:srgbClr val="333333"/>
+                </a:solidFill>
+                <a:latin typeface="Montserrat"/>
+              </a:rPr>
+              <a:t>▸ mistral-7b vs llama3-70b vs claude-3-5-sonnet</a:t>
+            </a:r>
+          </a:p>
+        </p:txBody>
+      </p:sp>
+      <p:sp>
+        <p:nvSpPr>
+          <p:cNvPr id="8" name="Rounded Rectangle 7"/>
+          <p:cNvSpPr/>
+          <p:nvPr/>
+        </p:nvSpPr>
+        <p:spPr>
+          <a:xfrm>
+            <a:off x="1745672" y="4754880"/>
+            <a:ext cx="8562109" cy="914400"/>
+          </a:xfrm>
+          <a:prstGeom prst="roundRect">
+            <a:avLst/>
+          </a:prstGeom>
+          <a:solidFill>
+            <a:srgbClr val="F3F3F3"/>
+          </a:solidFill>
+          <a:ln w="12700">
+            <a:solidFill>
+              <a:srgbClr val="DDDDDD"/>
+            </a:solidFill>
+          </a:ln>
+          <a:effectLst/>
+        </p:spPr>
+        <p:style>
+          <a:lnRef idx="1">
+            <a:schemeClr val="accent1"/>
+          </a:lnRef>
+          <a:fillRef idx="3">
+            <a:schemeClr val="accent1"/>
+          </a:fillRef>
+          <a:effectRef idx="2">
+            <a:schemeClr val="accent1"/>
+          </a:effectRef>
+          <a:fontRef idx="minor">
+            <a:schemeClr val="lt1"/>
+          </a:fontRef>
+        </p:style>
+        <p:txBody>
+          <a:bodyPr wrap="square" lIns="137160" tIns="91440" rtlCol="0" anchor="ctr"/>
+          <a:lstStyle/>
+          <a:p>
+            <a:pPr algn="ctr">
+              <a:spcAft>
+                <a:spcPts val="400"/>
+              </a:spcAft>
+            </a:pPr>
+            <a:r>
+              <a:rPr sz="1300" b="1" dirty="0">
+                <a:solidFill>
+                  <a:srgbClr val="058DC7"/>
+                </a:solidFill>
+                <a:latin typeface="Montserrat"/>
+              </a:rPr>
+              <a:t>Ex 5: Scale Simulation</a:t>
+            </a:r>
+          </a:p>
+          <a:p>
+            <a:pPr>
+              <a:spcBef>
+                <a:spcPts val="100"/>
+              </a:spcBef>
+              <a:spcAft>
+                <a:spcPts val="100"/>
+              </a:spcAft>
+            </a:pPr>
+            <a:r>
+              <a:rPr dirty="0">
+                <a:solidFill>
+                  <a:srgbClr val="333333"/>
+                </a:solidFill>
+                <a:latin typeface="Montserrat"/>
+              </a:rPr>
+              <a:t>▸ Test on 5 rows → measure cost → project to 500K rows → decide</a:t>
+            </a:r>
+          </a:p>
+        </p:txBody>
+      </p:sp>
+    </p:spTree>
+  </p:cSld>
+  <p:clrMapOvr>
+    <a:masterClrMapping/>
+  </p:clrMapOvr>
+</p:sld>
+</file>
+
+<file path=ppt/slides/slide11.xml><?xml version="1.0" encoding="utf-8"?>
 <p:sld xmlns:a="http://schemas.openxmlformats.org/drawingml/2006/main" xmlns:r="http://schemas.openxmlformats.org/officeDocument/2006/relationships" xmlns:p="http://schemas.openxmlformats.org/presentationml/2006/main">
   <p:cSld>
     <p:spTree>
@@ -11764,7 +12333,7 @@
 </p:sld>
 </file>
 
-<file path=ppt/slides/slide11.xml><?xml version="1.0" encoding="utf-8"?>
+<file path=ppt/slides/slide12.xml><?xml version="1.0" encoding="utf-8"?>
 <p:sld xmlns:a="http://schemas.openxmlformats.org/drawingml/2006/main" xmlns:r="http://schemas.openxmlformats.org/officeDocument/2006/relationships" xmlns:p="http://schemas.openxmlformats.org/presentationml/2006/main">
   <p:cSld>
     <p:spTree>
@@ -12571,7 +13140,7 @@
 </p:sld>
 </file>
 
-<file path=ppt/slides/slide12.xml><?xml version="1.0" encoding="utf-8"?>
+<file path=ppt/slides/slide13.xml><?xml version="1.0" encoding="utf-8"?>
 <p:sld xmlns:a="http://schemas.openxmlformats.org/drawingml/2006/main" xmlns:r="http://schemas.openxmlformats.org/officeDocument/2006/relationships" xmlns:p="http://schemas.openxmlformats.org/presentationml/2006/main">
   <p:cSld>
     <p:spTree>
@@ -13208,7 +13777,7 @@
 </p:sld>
 </file>
 
-<file path=ppt/slides/slide13.xml><?xml version="1.0" encoding="utf-8"?>
+<file path=ppt/slides/slide14.xml><?xml version="1.0" encoding="utf-8"?>
 <p:sld xmlns:a="http://schemas.openxmlformats.org/drawingml/2006/main" xmlns:r="http://schemas.openxmlformats.org/officeDocument/2006/relationships" xmlns:p="http://schemas.openxmlformats.org/presentationml/2006/main">
   <p:cSld>
     <p:spTree>
@@ -13268,7 +13837,7 @@
 </p:sld>
 </file>
 
-<file path=ppt/slides/slide14.xml><?xml version="1.0" encoding="utf-8"?>
+<file path=ppt/slides/slide15.xml><?xml version="1.0" encoding="utf-8"?>
 <p:sld xmlns:a="http://schemas.openxmlformats.org/drawingml/2006/main" xmlns:r="http://schemas.openxmlformats.org/officeDocument/2006/relationships" xmlns:p="http://schemas.openxmlformats.org/presentationml/2006/main">
   <p:cSld>
     <p:spTree>
@@ -13918,7 +14487,7 @@
 </p:sld>
 </file>
 
-<file path=ppt/slides/slide15.xml><?xml version="1.0" encoding="utf-8"?>
+<file path=ppt/slides/slide16.xml><?xml version="1.0" encoding="utf-8"?>
 <p:sld xmlns:a="http://schemas.openxmlformats.org/drawingml/2006/main" xmlns:r="http://schemas.openxmlformats.org/officeDocument/2006/relationships" xmlns:p="http://schemas.openxmlformats.org/presentationml/2006/main">
   <p:cSld>
     <p:spTree>
@@ -14597,7 +15166,7 @@
 </p:sld>
 </file>
 
-<file path=ppt/slides/slide16.xml><?xml version="1.0" encoding="utf-8"?>
+<file path=ppt/slides/slide17.xml><?xml version="1.0" encoding="utf-8"?>
 <p:sld xmlns:a="http://schemas.openxmlformats.org/drawingml/2006/main" xmlns:r="http://schemas.openxmlformats.org/officeDocument/2006/relationships" xmlns:p="http://schemas.openxmlformats.org/presentationml/2006/main">
   <p:cSld>
     <p:spTree>
@@ -15303,6 +15872,919 @@
           <p:cNvPr id="2" name="Title 1">
             <a:extLst>
               <a:ext uri="{FF2B5EF4-FFF2-40B4-BE49-F238E27FC236}">
+                <a16:creationId xmlns:a16="http://schemas.microsoft.com/office/drawing/2014/main" id="{5119672C-B8EE-1C8D-BFDC-9857D4BD29B0}"/>
+              </a:ext>
+            </a:extLst>
+          </p:cNvPr>
+          <p:cNvSpPr>
+            <a:spLocks noGrp="1"/>
+          </p:cNvSpPr>
+          <p:nvPr>
+            <p:ph type="title"/>
+          </p:nvPr>
+        </p:nvSpPr>
+        <p:spPr/>
+        <p:txBody>
+          <a:bodyPr/>
+          <a:lstStyle/>
+          <a:p>
+            <a:r>
+              <a:rPr lang="en-US" dirty="0"/>
+              <a:t>About Us</a:t>
+            </a:r>
+          </a:p>
+        </p:txBody>
+      </p:sp>
+      <p:sp>
+        <p:nvSpPr>
+          <p:cNvPr id="3" name="Text Placeholder 2">
+            <a:extLst>
+              <a:ext uri="{FF2B5EF4-FFF2-40B4-BE49-F238E27FC236}">
+                <a16:creationId xmlns:a16="http://schemas.microsoft.com/office/drawing/2014/main" id="{68CD6026-E2DB-CC3A-B26F-147A5163F775}"/>
+              </a:ext>
+            </a:extLst>
+          </p:cNvPr>
+          <p:cNvSpPr>
+            <a:spLocks noGrp="1"/>
+          </p:cNvSpPr>
+          <p:nvPr>
+            <p:ph type="body" idx="1"/>
+          </p:nvPr>
+        </p:nvSpPr>
+        <p:spPr/>
+        <p:txBody>
+          <a:bodyPr/>
+          <a:lstStyle/>
+          <a:p>
+            <a:endParaRPr lang="en-US"/>
+          </a:p>
+        </p:txBody>
+      </p:sp>
+      <p:sp>
+        <p:nvSpPr>
+          <p:cNvPr id="4" name="Google Shape;321;g3d58d88af43_0_1063">
+            <a:extLst>
+              <a:ext uri="{FF2B5EF4-FFF2-40B4-BE49-F238E27FC236}">
+                <a16:creationId xmlns:a16="http://schemas.microsoft.com/office/drawing/2014/main" id="{155BCE64-F59C-2ECF-4C02-288D4504490A}"/>
+              </a:ext>
+            </a:extLst>
+          </p:cNvPr>
+          <p:cNvSpPr/>
+          <p:nvPr/>
+        </p:nvSpPr>
+        <p:spPr>
+          <a:xfrm>
+            <a:off x="619125" y="1714500"/>
+            <a:ext cx="5381700" cy="3157303"/>
+          </a:xfrm>
+          <a:prstGeom prst="roundRect">
+            <a:avLst>
+              <a:gd name="adj" fmla="val 2500"/>
+            </a:avLst>
+          </a:prstGeom>
+          <a:solidFill>
+            <a:srgbClr val="FFFFFF"/>
+          </a:solidFill>
+          <a:ln w="9525" cap="flat" cmpd="sng">
+            <a:solidFill>
+              <a:srgbClr val="E2E8F0"/>
+            </a:solidFill>
+            <a:prstDash val="solid"/>
+            <a:round/>
+            <a:headEnd type="none" w="sm" len="sm"/>
+            <a:tailEnd type="none" w="sm" len="sm"/>
+          </a:ln>
+        </p:spPr>
+        <p:txBody>
+          <a:bodyPr spcFirstLastPara="1" wrap="square" lIns="0" tIns="0" rIns="0" bIns="0" anchor="ctr" anchorCtr="0">
+            <a:noAutofit/>
+          </a:bodyPr>
+          <a:lstStyle/>
+          <a:p>
+            <a:pPr marL="0" lvl="0" indent="0" algn="l" rtl="0">
+              <a:spcBef>
+                <a:spcPts val="0"/>
+              </a:spcBef>
+              <a:spcAft>
+                <a:spcPts val="0"/>
+              </a:spcAft>
+              <a:buNone/>
+            </a:pPr>
+            <a:endParaRPr/>
+          </a:p>
+        </p:txBody>
+      </p:sp>
+      <p:sp>
+        <p:nvSpPr>
+          <p:cNvPr id="5" name="Google Shape;322;g3d58d88af43_0_1063">
+            <a:extLst>
+              <a:ext uri="{FF2B5EF4-FFF2-40B4-BE49-F238E27FC236}">
+                <a16:creationId xmlns:a16="http://schemas.microsoft.com/office/drawing/2014/main" id="{0EC5B5E3-AE28-0AA6-DD7A-A0835B2583A3}"/>
+              </a:ext>
+            </a:extLst>
+          </p:cNvPr>
+          <p:cNvSpPr/>
+          <p:nvPr/>
+        </p:nvSpPr>
+        <p:spPr>
+          <a:xfrm>
+            <a:off x="6191250" y="1714500"/>
+            <a:ext cx="5381700" cy="3157303"/>
+          </a:xfrm>
+          <a:prstGeom prst="roundRect">
+            <a:avLst>
+              <a:gd name="adj" fmla="val 2500"/>
+            </a:avLst>
+          </a:prstGeom>
+          <a:solidFill>
+            <a:srgbClr val="FFFFFF"/>
+          </a:solidFill>
+          <a:ln w="9525" cap="flat" cmpd="sng">
+            <a:solidFill>
+              <a:srgbClr val="E2E8F0"/>
+            </a:solidFill>
+            <a:prstDash val="solid"/>
+            <a:round/>
+            <a:headEnd type="none" w="sm" len="sm"/>
+            <a:tailEnd type="none" w="sm" len="sm"/>
+          </a:ln>
+        </p:spPr>
+        <p:txBody>
+          <a:bodyPr spcFirstLastPara="1" wrap="square" lIns="0" tIns="0" rIns="0" bIns="0" anchor="ctr" anchorCtr="0">
+            <a:noAutofit/>
+          </a:bodyPr>
+          <a:lstStyle/>
+          <a:p>
+            <a:pPr marL="0" lvl="0" indent="0" algn="l" rtl="0">
+              <a:spcBef>
+                <a:spcPts val="0"/>
+              </a:spcBef>
+              <a:spcAft>
+                <a:spcPts val="0"/>
+              </a:spcAft>
+              <a:buNone/>
+            </a:pPr>
+            <a:endParaRPr/>
+          </a:p>
+        </p:txBody>
+      </p:sp>
+      <p:sp>
+        <p:nvSpPr>
+          <p:cNvPr id="6" name="Google Shape;324;g3d58d88af43_0_1063">
+            <a:extLst>
+              <a:ext uri="{FF2B5EF4-FFF2-40B4-BE49-F238E27FC236}">
+                <a16:creationId xmlns:a16="http://schemas.microsoft.com/office/drawing/2014/main" id="{9B25D86E-E8FB-2805-D7BE-35383684B9C4}"/>
+              </a:ext>
+            </a:extLst>
+          </p:cNvPr>
+          <p:cNvSpPr/>
+          <p:nvPr/>
+        </p:nvSpPr>
+        <p:spPr>
+          <a:xfrm>
+            <a:off x="809625" y="1905000"/>
+            <a:ext cx="493500" cy="493500"/>
+          </a:xfrm>
+          <a:prstGeom prst="rect">
+            <a:avLst/>
+          </a:prstGeom>
+          <a:solidFill>
+            <a:srgbClr val="000000">
+              <a:alpha val="0"/>
+            </a:srgbClr>
+          </a:solidFill>
+          <a:ln>
+            <a:noFill/>
+          </a:ln>
+        </p:spPr>
+        <p:txBody>
+          <a:bodyPr spcFirstLastPara="1" wrap="square" lIns="0" tIns="0" rIns="0" bIns="0" anchor="ctr" anchorCtr="0">
+            <a:noAutofit/>
+          </a:bodyPr>
+          <a:lstStyle/>
+          <a:p>
+            <a:pPr marL="0" lvl="0" indent="0" algn="ctr" rtl="0">
+              <a:spcBef>
+                <a:spcPts val="0"/>
+              </a:spcBef>
+              <a:spcAft>
+                <a:spcPts val="0"/>
+              </a:spcAft>
+              <a:buNone/>
+            </a:pPr>
+            <a:r>
+              <a:rPr lang="en-US" sz="1800" b="1">
+                <a:solidFill>
+                  <a:srgbClr val="FFFFFF"/>
+                </a:solidFill>
+                <a:latin typeface="Arial"/>
+                <a:ea typeface="Arial"/>
+                <a:cs typeface="Arial"/>
+                <a:sym typeface="Arial"/>
+              </a:rPr>
+              <a:t>V</a:t>
+            </a:r>
+            <a:endParaRPr sz="1800" b="1">
+              <a:solidFill>
+                <a:srgbClr val="FFFFFF"/>
+              </a:solidFill>
+              <a:latin typeface="Arial"/>
+              <a:ea typeface="Arial"/>
+              <a:cs typeface="Arial"/>
+              <a:sym typeface="Arial"/>
+            </a:endParaRPr>
+          </a:p>
+        </p:txBody>
+      </p:sp>
+      <p:sp>
+        <p:nvSpPr>
+          <p:cNvPr id="7" name="Google Shape;325;g3d58d88af43_0_1063">
+            <a:extLst>
+              <a:ext uri="{FF2B5EF4-FFF2-40B4-BE49-F238E27FC236}">
+                <a16:creationId xmlns:a16="http://schemas.microsoft.com/office/drawing/2014/main" id="{D4249DE6-E9DA-B6A7-A700-91092144C246}"/>
+              </a:ext>
+            </a:extLst>
+          </p:cNvPr>
+          <p:cNvSpPr/>
+          <p:nvPr/>
+        </p:nvSpPr>
+        <p:spPr>
+          <a:xfrm>
+            <a:off x="838200" y="1962874"/>
+            <a:ext cx="3143400" cy="381000"/>
+          </a:xfrm>
+          <a:prstGeom prst="rect">
+            <a:avLst/>
+          </a:prstGeom>
+          <a:solidFill>
+            <a:srgbClr val="000000">
+              <a:alpha val="0"/>
+            </a:srgbClr>
+          </a:solidFill>
+          <a:ln>
+            <a:noFill/>
+          </a:ln>
+        </p:spPr>
+        <p:txBody>
+          <a:bodyPr spcFirstLastPara="1" wrap="square" lIns="0" tIns="0" rIns="0" bIns="0" anchor="ctr" anchorCtr="0">
+            <a:noAutofit/>
+          </a:bodyPr>
+          <a:lstStyle/>
+          <a:p>
+            <a:pPr marL="0" lvl="0" indent="0" algn="l" rtl="0">
+              <a:spcBef>
+                <a:spcPts val="0"/>
+              </a:spcBef>
+              <a:spcAft>
+                <a:spcPts val="0"/>
+              </a:spcAft>
+              <a:buNone/>
+            </a:pPr>
+            <a:r>
+              <a:rPr lang="en-US" sz="2000" b="1" dirty="0">
+                <a:solidFill>
+                  <a:srgbClr val="0F172A"/>
+                </a:solidFill>
+                <a:latin typeface="Arial"/>
+                <a:ea typeface="Arial"/>
+                <a:cs typeface="Arial"/>
+                <a:sym typeface="Arial"/>
+              </a:rPr>
+              <a:t>Velu Natarajan</a:t>
+            </a:r>
+            <a:endParaRPr sz="2000" b="1" dirty="0">
+              <a:solidFill>
+                <a:srgbClr val="0F172A"/>
+              </a:solidFill>
+              <a:latin typeface="Arial"/>
+              <a:ea typeface="Arial"/>
+              <a:cs typeface="Arial"/>
+              <a:sym typeface="Arial"/>
+            </a:endParaRPr>
+          </a:p>
+        </p:txBody>
+      </p:sp>
+      <p:sp>
+        <p:nvSpPr>
+          <p:cNvPr id="9" name="Google Shape;329;g3d58d88af43_0_1063">
+            <a:extLst>
+              <a:ext uri="{FF2B5EF4-FFF2-40B4-BE49-F238E27FC236}">
+                <a16:creationId xmlns:a16="http://schemas.microsoft.com/office/drawing/2014/main" id="{3A04F98A-F677-68B6-97D7-7FB0E1DA7913}"/>
+              </a:ext>
+            </a:extLst>
+          </p:cNvPr>
+          <p:cNvSpPr/>
+          <p:nvPr/>
+        </p:nvSpPr>
+        <p:spPr>
+          <a:xfrm>
+            <a:off x="6505726" y="1949133"/>
+            <a:ext cx="3143400" cy="381000"/>
+          </a:xfrm>
+          <a:prstGeom prst="rect">
+            <a:avLst/>
+          </a:prstGeom>
+          <a:solidFill>
+            <a:srgbClr val="000000">
+              <a:alpha val="0"/>
+            </a:srgbClr>
+          </a:solidFill>
+          <a:ln>
+            <a:noFill/>
+          </a:ln>
+        </p:spPr>
+        <p:txBody>
+          <a:bodyPr spcFirstLastPara="1" wrap="square" lIns="0" tIns="0" rIns="0" bIns="0" anchor="ctr" anchorCtr="0">
+            <a:noAutofit/>
+          </a:bodyPr>
+          <a:lstStyle/>
+          <a:p>
+            <a:pPr marL="0" lvl="0" indent="0" algn="l" rtl="0">
+              <a:spcBef>
+                <a:spcPts val="0"/>
+              </a:spcBef>
+              <a:spcAft>
+                <a:spcPts val="0"/>
+              </a:spcAft>
+              <a:buNone/>
+            </a:pPr>
+            <a:r>
+              <a:rPr lang="en-US" sz="2000" b="1" dirty="0">
+                <a:solidFill>
+                  <a:srgbClr val="0F172A"/>
+                </a:solidFill>
+                <a:latin typeface="Arial"/>
+                <a:ea typeface="Arial"/>
+                <a:cs typeface="Arial"/>
+                <a:sym typeface="Arial"/>
+              </a:rPr>
+              <a:t>Krishnakumar</a:t>
+            </a:r>
+            <a:endParaRPr sz="2000" b="1" dirty="0">
+              <a:solidFill>
+                <a:srgbClr val="0F172A"/>
+              </a:solidFill>
+              <a:latin typeface="Arial"/>
+              <a:ea typeface="Arial"/>
+              <a:cs typeface="Arial"/>
+              <a:sym typeface="Arial"/>
+            </a:endParaRPr>
+          </a:p>
+        </p:txBody>
+      </p:sp>
+      <p:sp>
+        <p:nvSpPr>
+          <p:cNvPr id="10" name="Google Shape;330;g3d58d88af43_0_1063">
+            <a:extLst>
+              <a:ext uri="{FF2B5EF4-FFF2-40B4-BE49-F238E27FC236}">
+                <a16:creationId xmlns:a16="http://schemas.microsoft.com/office/drawing/2014/main" id="{33E24E9B-4CA5-2507-959A-9B7797365A59}"/>
+              </a:ext>
+            </a:extLst>
+          </p:cNvPr>
+          <p:cNvSpPr/>
+          <p:nvPr/>
+        </p:nvSpPr>
+        <p:spPr>
+          <a:xfrm>
+            <a:off x="6381750" y="2777068"/>
+            <a:ext cx="5000700" cy="2589412"/>
+          </a:xfrm>
+          <a:prstGeom prst="rect">
+            <a:avLst/>
+          </a:prstGeom>
+          <a:solidFill>
+            <a:srgbClr val="000000">
+              <a:alpha val="0"/>
+            </a:srgbClr>
+          </a:solidFill>
+          <a:ln>
+            <a:noFill/>
+          </a:ln>
+        </p:spPr>
+        <p:txBody>
+          <a:bodyPr spcFirstLastPara="1" wrap="square" lIns="0" tIns="0" rIns="0" bIns="0" anchor="t" anchorCtr="0">
+            <a:noAutofit/>
+          </a:bodyPr>
+          <a:lstStyle/>
+          <a:p>
+            <a:pPr marL="457200" lvl="0" indent="-311150" algn="l" rtl="0">
+              <a:spcBef>
+                <a:spcPts val="0"/>
+              </a:spcBef>
+              <a:spcAft>
+                <a:spcPts val="0"/>
+              </a:spcAft>
+              <a:buClr>
+                <a:srgbClr val="475569"/>
+              </a:buClr>
+              <a:buSzPts val="1300"/>
+              <a:buFont typeface="Arial"/>
+              <a:buChar char="●"/>
+            </a:pPr>
+            <a:r>
+              <a:rPr lang="en-US" sz="1300" b="0" dirty="0">
+                <a:solidFill>
+                  <a:srgbClr val="475569"/>
+                </a:solidFill>
+                <a:latin typeface="Arial"/>
+                <a:ea typeface="Arial"/>
+                <a:cs typeface="Arial"/>
+                <a:sym typeface="Arial"/>
+              </a:rPr>
+              <a:t>Oracle ACE Pro</a:t>
+            </a:r>
+            <a:endParaRPr sz="1300" b="0" dirty="0">
+              <a:solidFill>
+                <a:srgbClr val="475569"/>
+              </a:solidFill>
+              <a:latin typeface="Arial"/>
+              <a:ea typeface="Arial"/>
+              <a:cs typeface="Arial"/>
+              <a:sym typeface="Arial"/>
+            </a:endParaRPr>
+          </a:p>
+          <a:p>
+            <a:pPr marL="457200" lvl="0" indent="-311150" algn="l" rtl="0">
+              <a:spcBef>
+                <a:spcPts val="600"/>
+              </a:spcBef>
+              <a:spcAft>
+                <a:spcPts val="0"/>
+              </a:spcAft>
+              <a:buClr>
+                <a:srgbClr val="475569"/>
+              </a:buClr>
+              <a:buSzPts val="1300"/>
+              <a:buFont typeface="Arial"/>
+              <a:buChar char="●"/>
+            </a:pPr>
+            <a:r>
+              <a:rPr lang="en-US" sz="1300" b="0" dirty="0">
+                <a:solidFill>
+                  <a:srgbClr val="475569"/>
+                </a:solidFill>
+                <a:latin typeface="Arial"/>
+                <a:ea typeface="Arial"/>
+                <a:cs typeface="Arial"/>
+                <a:sym typeface="Arial"/>
+              </a:rPr>
+              <a:t>Cloud and data architecture specialist</a:t>
+            </a:r>
+            <a:endParaRPr sz="1300" b="0" dirty="0">
+              <a:solidFill>
+                <a:srgbClr val="475569"/>
+              </a:solidFill>
+              <a:latin typeface="Arial"/>
+              <a:ea typeface="Arial"/>
+              <a:cs typeface="Arial"/>
+              <a:sym typeface="Arial"/>
+            </a:endParaRPr>
+          </a:p>
+          <a:p>
+            <a:pPr marL="457200" lvl="0" indent="-311150" algn="l" rtl="0">
+              <a:spcBef>
+                <a:spcPts val="600"/>
+              </a:spcBef>
+              <a:spcAft>
+                <a:spcPts val="0"/>
+              </a:spcAft>
+              <a:buClr>
+                <a:srgbClr val="475569"/>
+              </a:buClr>
+              <a:buSzPts val="1300"/>
+              <a:buFont typeface="Arial"/>
+              <a:buChar char="●"/>
+            </a:pPr>
+            <a:r>
+              <a:rPr lang="en-US" sz="1300" b="0" dirty="0">
+                <a:solidFill>
+                  <a:srgbClr val="475569"/>
+                </a:solidFill>
+                <a:latin typeface="Arial"/>
+                <a:ea typeface="Arial"/>
+                <a:cs typeface="Arial"/>
+                <a:sym typeface="Arial"/>
+              </a:rPr>
+              <a:t>International conference speaker</a:t>
+            </a:r>
+            <a:endParaRPr sz="1300" b="0" dirty="0">
+              <a:solidFill>
+                <a:srgbClr val="475569"/>
+              </a:solidFill>
+              <a:latin typeface="Arial"/>
+              <a:ea typeface="Arial"/>
+              <a:cs typeface="Arial"/>
+              <a:sym typeface="Arial"/>
+            </a:endParaRPr>
+          </a:p>
+          <a:p>
+            <a:pPr marL="457200" lvl="0" indent="-311150" algn="l" rtl="0">
+              <a:spcBef>
+                <a:spcPts val="600"/>
+              </a:spcBef>
+              <a:spcAft>
+                <a:spcPts val="0"/>
+              </a:spcAft>
+              <a:buClr>
+                <a:srgbClr val="475569"/>
+              </a:buClr>
+              <a:buSzPts val="1300"/>
+              <a:buFont typeface="Arial"/>
+              <a:buChar char="●"/>
+            </a:pPr>
+            <a:r>
+              <a:rPr lang="en-US" sz="1300" b="0" dirty="0">
+                <a:solidFill>
+                  <a:srgbClr val="475569"/>
+                </a:solidFill>
+                <a:latin typeface="Arial"/>
+                <a:ea typeface="Arial"/>
+                <a:cs typeface="Arial"/>
+                <a:sym typeface="Arial"/>
+              </a:rPr>
+              <a:t>Co-Author and Technical reviewer of books</a:t>
+            </a:r>
+            <a:endParaRPr sz="1300" b="0" dirty="0">
+              <a:solidFill>
+                <a:srgbClr val="475569"/>
+              </a:solidFill>
+              <a:latin typeface="Arial"/>
+              <a:ea typeface="Arial"/>
+              <a:cs typeface="Arial"/>
+              <a:sym typeface="Arial"/>
+            </a:endParaRPr>
+          </a:p>
+          <a:p>
+            <a:pPr marL="457200" lvl="0" indent="-311150" algn="l" rtl="0">
+              <a:spcBef>
+                <a:spcPts val="600"/>
+              </a:spcBef>
+              <a:spcAft>
+                <a:spcPts val="0"/>
+              </a:spcAft>
+              <a:buClr>
+                <a:srgbClr val="475569"/>
+              </a:buClr>
+              <a:buSzPts val="1300"/>
+              <a:buFont typeface="Arial"/>
+              <a:buChar char="●"/>
+            </a:pPr>
+            <a:r>
+              <a:rPr lang="en-US" sz="1300" b="0" dirty="0">
+                <a:solidFill>
+                  <a:srgbClr val="475569"/>
+                </a:solidFill>
+                <a:latin typeface="Arial"/>
+                <a:ea typeface="Arial"/>
+                <a:cs typeface="Arial"/>
+                <a:sym typeface="Arial"/>
+              </a:rPr>
+              <a:t>20+ years in enterprise data and cloud technologies</a:t>
+            </a:r>
+            <a:endParaRPr sz="1300" b="0" dirty="0">
+              <a:solidFill>
+                <a:srgbClr val="475569"/>
+              </a:solidFill>
+              <a:latin typeface="Arial"/>
+              <a:ea typeface="Arial"/>
+              <a:cs typeface="Arial"/>
+              <a:sym typeface="Arial"/>
+            </a:endParaRPr>
+          </a:p>
+          <a:p>
+            <a:pPr marL="457200" lvl="0" indent="-311150" algn="l" rtl="0">
+              <a:spcBef>
+                <a:spcPts val="600"/>
+              </a:spcBef>
+              <a:spcAft>
+                <a:spcPts val="0"/>
+              </a:spcAft>
+              <a:buClr>
+                <a:srgbClr val="475569"/>
+              </a:buClr>
+              <a:buSzPts val="1300"/>
+              <a:buFont typeface="Arial"/>
+              <a:buChar char="●"/>
+            </a:pPr>
+            <a:r>
+              <a:rPr lang="en-US" sz="1300" b="0" dirty="0">
+                <a:solidFill>
+                  <a:srgbClr val="475569"/>
+                </a:solidFill>
+                <a:latin typeface="Arial"/>
+                <a:ea typeface="Arial"/>
+                <a:cs typeface="Arial"/>
+                <a:sym typeface="Arial"/>
+              </a:rPr>
+              <a:t>Focused on AI-ready data platforms and multi-cloud interoperability</a:t>
+            </a:r>
+            <a:endParaRPr sz="1300" b="0" dirty="0">
+              <a:solidFill>
+                <a:srgbClr val="475569"/>
+              </a:solidFill>
+              <a:latin typeface="Arial"/>
+              <a:ea typeface="Arial"/>
+              <a:cs typeface="Arial"/>
+              <a:sym typeface="Arial"/>
+            </a:endParaRPr>
+          </a:p>
+        </p:txBody>
+      </p:sp>
+      <p:pic>
+        <p:nvPicPr>
+          <p:cNvPr id="11" name="Google Shape;333;g3d58d88af43_0_1063">
+            <a:extLst>
+              <a:ext uri="{FF2B5EF4-FFF2-40B4-BE49-F238E27FC236}">
+                <a16:creationId xmlns:a16="http://schemas.microsoft.com/office/drawing/2014/main" id="{1D5FA49B-CA16-C861-0030-42A9290918C5}"/>
+              </a:ext>
+            </a:extLst>
+          </p:cNvPr>
+          <p:cNvPicPr preferRelativeResize="0"/>
+          <p:nvPr/>
+        </p:nvPicPr>
+        <p:blipFill rotWithShape="1">
+          <a:blip r:embed="rId2">
+            <a:alphaModFix/>
+          </a:blip>
+          <a:srcRect/>
+          <a:stretch/>
+        </p:blipFill>
+        <p:spPr>
+          <a:xfrm>
+            <a:off x="10357415" y="1772374"/>
+            <a:ext cx="1143000" cy="1143000"/>
+          </a:xfrm>
+          <a:prstGeom prst="rect">
+            <a:avLst/>
+          </a:prstGeom>
+          <a:noFill/>
+          <a:ln>
+            <a:noFill/>
+          </a:ln>
+        </p:spPr>
+      </p:pic>
+      <p:pic>
+        <p:nvPicPr>
+          <p:cNvPr id="12" name="Picture 11">
+            <a:extLst>
+              <a:ext uri="{FF2B5EF4-FFF2-40B4-BE49-F238E27FC236}">
+                <a16:creationId xmlns:a16="http://schemas.microsoft.com/office/drawing/2014/main" id="{20A2863B-3FCD-B7BE-5E24-8E90BF78A3E8}"/>
+              </a:ext>
+            </a:extLst>
+          </p:cNvPr>
+          <p:cNvPicPr>
+            <a:picLocks noChangeAspect="1"/>
+          </p:cNvPicPr>
+          <p:nvPr/>
+        </p:nvPicPr>
+        <p:blipFill>
+          <a:blip r:embed="rId3"/>
+          <a:stretch>
+            <a:fillRect/>
+          </a:stretch>
+        </p:blipFill>
+        <p:spPr>
+          <a:xfrm>
+            <a:off x="4714951" y="1777538"/>
+            <a:ext cx="1236570" cy="1137835"/>
+          </a:xfrm>
+          <a:prstGeom prst="rect">
+            <a:avLst/>
+          </a:prstGeom>
+        </p:spPr>
+      </p:pic>
+      <p:sp>
+        <p:nvSpPr>
+          <p:cNvPr id="13" name="Google Shape;326;g3d58d88af43_0_1063">
+            <a:extLst>
+              <a:ext uri="{FF2B5EF4-FFF2-40B4-BE49-F238E27FC236}">
+                <a16:creationId xmlns:a16="http://schemas.microsoft.com/office/drawing/2014/main" id="{62E276B4-2310-B3C5-FFE5-4F93EBAC25DD}"/>
+              </a:ext>
+            </a:extLst>
+          </p:cNvPr>
+          <p:cNvSpPr/>
+          <p:nvPr/>
+        </p:nvSpPr>
+        <p:spPr>
+          <a:xfrm>
+            <a:off x="809625" y="2777068"/>
+            <a:ext cx="5000700" cy="2094736"/>
+          </a:xfrm>
+          <a:prstGeom prst="rect">
+            <a:avLst/>
+          </a:prstGeom>
+          <a:solidFill>
+            <a:srgbClr val="000000">
+              <a:alpha val="0"/>
+            </a:srgbClr>
+          </a:solidFill>
+          <a:ln>
+            <a:noFill/>
+          </a:ln>
+        </p:spPr>
+        <p:txBody>
+          <a:bodyPr spcFirstLastPara="1" wrap="square" lIns="0" tIns="0" rIns="0" bIns="0" anchor="t" anchorCtr="0">
+            <a:noAutofit/>
+          </a:bodyPr>
+          <a:lstStyle/>
+          <a:p>
+            <a:pPr marL="457200" lvl="0" indent="-311150" algn="l" rtl="0">
+              <a:spcBef>
+                <a:spcPts val="0"/>
+              </a:spcBef>
+              <a:spcAft>
+                <a:spcPts val="0"/>
+              </a:spcAft>
+              <a:buClr>
+                <a:srgbClr val="475569"/>
+              </a:buClr>
+              <a:buSzPts val="1300"/>
+              <a:buFont typeface="Arial"/>
+              <a:buChar char="●"/>
+            </a:pPr>
+            <a:r>
+              <a:rPr lang="en-US" sz="1300" b="0" dirty="0">
+                <a:solidFill>
+                  <a:srgbClr val="475569"/>
+                </a:solidFill>
+                <a:latin typeface="Arial"/>
+                <a:ea typeface="Arial"/>
+                <a:cs typeface="Arial"/>
+                <a:sym typeface="Arial"/>
+              </a:rPr>
+              <a:t>Data &amp; FinOps Practitioner</a:t>
+            </a:r>
+            <a:endParaRPr sz="1300" b="0" dirty="0">
+              <a:solidFill>
+                <a:srgbClr val="475569"/>
+              </a:solidFill>
+              <a:latin typeface="Arial"/>
+              <a:ea typeface="Arial"/>
+              <a:cs typeface="Arial"/>
+              <a:sym typeface="Arial"/>
+            </a:endParaRPr>
+          </a:p>
+          <a:p>
+            <a:pPr marL="457200" lvl="0" indent="-311150">
+              <a:spcBef>
+                <a:spcPts val="900"/>
+              </a:spcBef>
+              <a:buClr>
+                <a:srgbClr val="475569"/>
+              </a:buClr>
+              <a:buSzPts val="1300"/>
+              <a:buFont typeface="Arial"/>
+              <a:buChar char="●"/>
+            </a:pPr>
+            <a:r>
+              <a:rPr lang="en-US" sz="1300" dirty="0">
+                <a:solidFill>
+                  <a:srgbClr val="475569"/>
+                </a:solidFill>
+              </a:rPr>
+              <a:t>Data Clouds</a:t>
+            </a:r>
+            <a:r>
+              <a:rPr lang="en-US" sz="1300" b="0" dirty="0">
+                <a:solidFill>
+                  <a:srgbClr val="475569"/>
+                </a:solidFill>
+                <a:latin typeface="Arial"/>
+                <a:ea typeface="Arial"/>
+                <a:cs typeface="Arial"/>
+                <a:sym typeface="Arial"/>
+              </a:rPr>
+              <a:t> Architect</a:t>
+            </a:r>
+            <a:endParaRPr sz="1300" b="0" dirty="0">
+              <a:solidFill>
+                <a:srgbClr val="475569"/>
+              </a:solidFill>
+              <a:latin typeface="Arial"/>
+              <a:ea typeface="Arial"/>
+              <a:cs typeface="Arial"/>
+              <a:sym typeface="Arial"/>
+            </a:endParaRPr>
+          </a:p>
+          <a:p>
+            <a:pPr marL="457200" indent="-311150">
+              <a:spcBef>
+                <a:spcPts val="900"/>
+              </a:spcBef>
+              <a:buClr>
+                <a:srgbClr val="475569"/>
+              </a:buClr>
+              <a:buSzPts val="1300"/>
+              <a:buFont typeface="Arial"/>
+              <a:buChar char="●"/>
+            </a:pPr>
+            <a:r>
+              <a:rPr lang="en-US" sz="1300" dirty="0">
+                <a:solidFill>
+                  <a:srgbClr val="475569"/>
+                </a:solidFill>
+              </a:rPr>
+              <a:t>Co-Author and Technical Reviewer of Technical Books</a:t>
+            </a:r>
+          </a:p>
+          <a:p>
+            <a:pPr marL="457200" indent="-311150">
+              <a:spcBef>
+                <a:spcPts val="900"/>
+              </a:spcBef>
+              <a:buClr>
+                <a:srgbClr val="475569"/>
+              </a:buClr>
+              <a:buSzPts val="1300"/>
+              <a:buFont typeface="Arial"/>
+              <a:buChar char="●"/>
+            </a:pPr>
+            <a:r>
+              <a:rPr lang="en-US" sz="1300" dirty="0">
+                <a:solidFill>
+                  <a:srgbClr val="475569"/>
+                </a:solidFill>
+              </a:rPr>
+              <a:t>20+ Years of Experience in Data and Cloud Technologies</a:t>
+            </a:r>
+          </a:p>
+          <a:p>
+            <a:pPr marL="457200" indent="-311150">
+              <a:spcBef>
+                <a:spcPts val="900"/>
+              </a:spcBef>
+              <a:buClr>
+                <a:srgbClr val="475569"/>
+              </a:buClr>
+              <a:buSzPts val="1300"/>
+              <a:buFont typeface="Arial"/>
+              <a:buChar char="●"/>
+            </a:pPr>
+            <a:r>
+              <a:rPr lang="en-US" sz="1300" dirty="0">
+                <a:solidFill>
+                  <a:srgbClr val="475569"/>
+                </a:solidFill>
+              </a:rPr>
+              <a:t>Contributor to Cloud Center of Excellence, Speaker, and Communities</a:t>
+            </a:r>
+          </a:p>
+          <a:p>
+            <a:pPr marL="146050" lvl="0" algn="l" rtl="0">
+              <a:spcBef>
+                <a:spcPts val="900"/>
+              </a:spcBef>
+              <a:spcAft>
+                <a:spcPts val="0"/>
+              </a:spcAft>
+              <a:buClr>
+                <a:srgbClr val="475569"/>
+              </a:buClr>
+              <a:buSzPts val="1300"/>
+            </a:pPr>
+            <a:endParaRPr lang="en-US" sz="1300" dirty="0">
+              <a:solidFill>
+                <a:srgbClr val="475569"/>
+              </a:solidFill>
+            </a:endParaRPr>
+          </a:p>
+        </p:txBody>
+      </p:sp>
+    </p:spTree>
+    <p:extLst>
+      <p:ext uri="{BB962C8B-B14F-4D97-AF65-F5344CB8AC3E}">
+        <p14:creationId xmlns:p14="http://schemas.microsoft.com/office/powerpoint/2010/main" val="35783498"/>
+      </p:ext>
+    </p:extLst>
+  </p:cSld>
+  <p:clrMapOvr>
+    <a:masterClrMapping/>
+  </p:clrMapOvr>
+</p:sld>
+</file>
+
+<file path=ppt/slides/slide3.xml><?xml version="1.0" encoding="utf-8"?>
+<p:sld xmlns:a="http://schemas.openxmlformats.org/drawingml/2006/main" xmlns:r="http://schemas.openxmlformats.org/officeDocument/2006/relationships" xmlns:p="http://schemas.openxmlformats.org/presentationml/2006/main">
+  <p:cSld>
+    <p:spTree>
+      <p:nvGrpSpPr>
+        <p:cNvPr id="1" name=""/>
+        <p:cNvGrpSpPr/>
+        <p:nvPr/>
+      </p:nvGrpSpPr>
+      <p:grpSpPr>
+        <a:xfrm>
+          <a:off x="0" y="0"/>
+          <a:ext cx="0" cy="0"/>
+          <a:chOff x="0" y="0"/>
+          <a:chExt cx="0" cy="0"/>
+        </a:xfrm>
+      </p:grpSpPr>
+      <p:sp>
+        <p:nvSpPr>
+          <p:cNvPr id="2" name="Title 1">
+            <a:extLst>
+              <a:ext uri="{FF2B5EF4-FFF2-40B4-BE49-F238E27FC236}">
                 <a16:creationId xmlns:a16="http://schemas.microsoft.com/office/drawing/2014/main" id="{026EFEA9-68D8-B99F-36D3-E5EAD7221A1F}"/>
               </a:ext>
             </a:extLst>
@@ -15354,7 +16836,7 @@
 </p:sld>
 </file>
 
-<file path=ppt/slides/slide3.xml><?xml version="1.0" encoding="utf-8"?>
+<file path=ppt/slides/slide4.xml><?xml version="1.0" encoding="utf-8"?>
 <p:sld xmlns:a="http://schemas.openxmlformats.org/drawingml/2006/main" xmlns:r="http://schemas.openxmlformats.org/officeDocument/2006/relationships" xmlns:p="http://schemas.openxmlformats.org/presentationml/2006/main">
   <p:cSld>
     <p:spTree>
@@ -15458,7 +16940,7 @@
 </p:sld>
 </file>
 
-<file path=ppt/slides/slide4.xml><?xml version="1.0" encoding="utf-8"?>
+<file path=ppt/slides/slide5.xml><?xml version="1.0" encoding="utf-8"?>
 <p:sld xmlns:a="http://schemas.openxmlformats.org/drawingml/2006/main" xmlns:r="http://schemas.openxmlformats.org/officeDocument/2006/relationships" xmlns:p="http://schemas.openxmlformats.org/presentationml/2006/main">
   <p:cSld>
     <p:spTree>
@@ -15846,7 +17328,7 @@
 </p:sld>
 </file>
 
-<file path=ppt/slides/slide5.xml><?xml version="1.0" encoding="utf-8"?>
+<file path=ppt/slides/slide6.xml><?xml version="1.0" encoding="utf-8"?>
 <p:sld xmlns:a="http://schemas.openxmlformats.org/drawingml/2006/main" xmlns:r="http://schemas.openxmlformats.org/officeDocument/2006/relationships" xmlns:p="http://schemas.openxmlformats.org/presentationml/2006/main">
   <p:cSld>
     <p:spTree>
@@ -16850,7 +18332,7 @@
 </p:sld>
 </file>
 
-<file path=ppt/slides/slide6.xml><?xml version="1.0" encoding="utf-8"?>
+<file path=ppt/slides/slide7.xml><?xml version="1.0" encoding="utf-8"?>
 <p:sld xmlns:a="http://schemas.openxmlformats.org/drawingml/2006/main" xmlns:r="http://schemas.openxmlformats.org/officeDocument/2006/relationships" xmlns:p="http://schemas.openxmlformats.org/presentationml/2006/main">
   <p:cSld>
     <p:spTree>
@@ -17571,7 +19053,7 @@
 </p:sld>
 </file>
 
-<file path=ppt/slides/slide7.xml><?xml version="1.0" encoding="utf-8"?>
+<file path=ppt/slides/slide8.xml><?xml version="1.0" encoding="utf-8"?>
 <p:sld xmlns:a="http://schemas.openxmlformats.org/drawingml/2006/main" xmlns:r="http://schemas.openxmlformats.org/officeDocument/2006/relationships" xmlns:p="http://schemas.openxmlformats.org/presentationml/2006/main">
   <p:cSld>
     <p:spTree>
@@ -18815,7 +20297,7 @@
 </p:sld>
 </file>
 
-<file path=ppt/slides/slide8.xml><?xml version="1.0" encoding="utf-8"?>
+<file path=ppt/slides/slide9.xml><?xml version="1.0" encoding="utf-8"?>
 <p:sld xmlns:a="http://schemas.openxmlformats.org/drawingml/2006/main" xmlns:r="http://schemas.openxmlformats.org/officeDocument/2006/relationships" xmlns:p="http://schemas.openxmlformats.org/presentationml/2006/main">
   <p:cSld>
     <p:spTree>
@@ -19460,574 +20942,6 @@
                 <a:latin typeface="Montserrat"/>
               </a:rPr>
               <a:t>.</a:t>
-            </a:r>
-          </a:p>
-        </p:txBody>
-      </p:sp>
-    </p:spTree>
-  </p:cSld>
-  <p:clrMapOvr>
-    <a:masterClrMapping/>
-  </p:clrMapOvr>
-</p:sld>
-</file>
-
-<file path=ppt/slides/slide9.xml><?xml version="1.0" encoding="utf-8"?>
-<p:sld xmlns:a="http://schemas.openxmlformats.org/drawingml/2006/main" xmlns:r="http://schemas.openxmlformats.org/officeDocument/2006/relationships" xmlns:p="http://schemas.openxmlformats.org/presentationml/2006/main">
-  <p:cSld>
-    <p:spTree>
-      <p:nvGrpSpPr>
-        <p:cNvPr id="1" name=""/>
-        <p:cNvGrpSpPr/>
-        <p:nvPr/>
-      </p:nvGrpSpPr>
-      <p:grpSpPr>
-        <a:xfrm>
-          <a:off x="0" y="0"/>
-          <a:ext cx="0" cy="0"/>
-          <a:chOff x="0" y="0"/>
-          <a:chExt cx="0" cy="0"/>
-        </a:xfrm>
-      </p:grpSpPr>
-      <p:sp>
-        <p:nvSpPr>
-          <p:cNvPr id="2" name="Title 1"/>
-          <p:cNvSpPr>
-            <a:spLocks noGrp="1"/>
-          </p:cNvSpPr>
-          <p:nvPr>
-            <p:ph type="title"/>
-          </p:nvPr>
-        </p:nvSpPr>
-        <p:spPr>
-          <a:xfrm>
-            <a:off x="640080" y="339408"/>
-            <a:ext cx="10515600" cy="718608"/>
-          </a:xfrm>
-        </p:spPr>
-        <p:txBody>
-          <a:bodyPr/>
-          <a:lstStyle/>
-          <a:p>
-            <a:r>
-              <a:rPr sz="2800" b="1" dirty="0">
-                <a:solidFill>
-                  <a:srgbClr val="058DC7"/>
-                </a:solidFill>
-                <a:latin typeface="Montserrat"/>
-              </a:rPr>
-              <a:t>AI SQL Hands-On Exercises</a:t>
-            </a:r>
-          </a:p>
-        </p:txBody>
-      </p:sp>
-      <p:sp>
-        <p:nvSpPr>
-          <p:cNvPr id="3" name="TextBox 2"/>
-          <p:cNvSpPr txBox="1"/>
-          <p:nvPr/>
-        </p:nvSpPr>
-        <p:spPr>
-          <a:xfrm>
-            <a:off x="640080" y="1005840"/>
-            <a:ext cx="10515600" cy="307777"/>
-          </a:xfrm>
-          <a:prstGeom prst="rect">
-            <a:avLst/>
-          </a:prstGeom>
-          <a:noFill/>
-        </p:spPr>
-        <p:txBody>
-          <a:bodyPr wrap="square">
-            <a:spAutoFit/>
-          </a:bodyPr>
-          <a:lstStyle/>
-          <a:p>
-            <a:pPr algn="l">
-              <a:defRPr sz="1400" b="0">
-                <a:solidFill>
-                  <a:srgbClr val="666666"/>
-                </a:solidFill>
-                <a:latin typeface="Montserrat"/>
-              </a:defRPr>
-            </a:pPr>
-            <a:r>
-              <a:rPr dirty="0"/>
-              <a:t>Module 05 </a:t>
-            </a:r>
-            <a:r>
-              <a:rPr lang="en-US" dirty="0"/>
-              <a:t>-</a:t>
-            </a:r>
-            <a:r>
-              <a:rPr dirty="0"/>
-              <a:t> Run Cortex functions and compare costs</a:t>
-            </a:r>
-          </a:p>
-        </p:txBody>
-      </p:sp>
-      <p:sp>
-        <p:nvSpPr>
-          <p:cNvPr id="4" name="Rounded Rectangle 3"/>
-          <p:cNvSpPr/>
-          <p:nvPr/>
-        </p:nvSpPr>
-        <p:spPr>
-          <a:xfrm>
-            <a:off x="640080" y="1463040"/>
-            <a:ext cx="5029200" cy="1371600"/>
-          </a:xfrm>
-          <a:prstGeom prst="roundRect">
-            <a:avLst/>
-          </a:prstGeom>
-          <a:solidFill>
-            <a:srgbClr val="F3F3F3"/>
-          </a:solidFill>
-          <a:ln w="12700">
-            <a:solidFill>
-              <a:srgbClr val="DDDDDD"/>
-            </a:solidFill>
-          </a:ln>
-          <a:effectLst/>
-        </p:spPr>
-        <p:style>
-          <a:lnRef idx="1">
-            <a:schemeClr val="accent1"/>
-          </a:lnRef>
-          <a:fillRef idx="3">
-            <a:schemeClr val="accent1"/>
-          </a:fillRef>
-          <a:effectRef idx="2">
-            <a:schemeClr val="accent1"/>
-          </a:effectRef>
-          <a:fontRef idx="minor">
-            <a:schemeClr val="lt1"/>
-          </a:fontRef>
-        </p:style>
-        <p:txBody>
-          <a:bodyPr wrap="square" lIns="137160" tIns="91440" rtlCol="0" anchor="ctr"/>
-          <a:lstStyle/>
-          <a:p>
-            <a:pPr algn="ctr">
-              <a:spcAft>
-                <a:spcPts val="400"/>
-              </a:spcAft>
-            </a:pPr>
-            <a:r>
-              <a:rPr sz="1300" b="1" dirty="0">
-                <a:solidFill>
-                  <a:srgbClr val="058DC7"/>
-                </a:solidFill>
-                <a:latin typeface="Montserrat"/>
-              </a:rPr>
-              <a:t>Ex 1: SENTIMENT()</a:t>
-            </a:r>
-          </a:p>
-          <a:p>
-            <a:pPr>
-              <a:spcBef>
-                <a:spcPts val="100"/>
-              </a:spcBef>
-              <a:spcAft>
-                <a:spcPts val="100"/>
-              </a:spcAft>
-            </a:pPr>
-            <a:r>
-              <a:rPr dirty="0">
-                <a:solidFill>
-                  <a:srgbClr val="333333"/>
-                </a:solidFill>
-                <a:latin typeface="Montserrat"/>
-              </a:rPr>
-              <a:t>▸ Analyze customer feedback sentiment</a:t>
-            </a:r>
-          </a:p>
-          <a:p>
-            <a:pPr>
-              <a:spcBef>
-                <a:spcPts val="100"/>
-              </a:spcBef>
-              <a:spcAft>
-                <a:spcPts val="100"/>
-              </a:spcAft>
-            </a:pPr>
-            <a:r>
-              <a:rPr dirty="0">
-                <a:solidFill>
-                  <a:srgbClr val="333333"/>
-                </a:solidFill>
-                <a:latin typeface="Montserrat"/>
-              </a:rPr>
-              <a:t>▸ No model param needed</a:t>
-            </a:r>
-          </a:p>
-        </p:txBody>
-      </p:sp>
-      <p:sp>
-        <p:nvSpPr>
-          <p:cNvPr id="5" name="Rounded Rectangle 4"/>
-          <p:cNvSpPr/>
-          <p:nvPr/>
-        </p:nvSpPr>
-        <p:spPr>
-          <a:xfrm>
-            <a:off x="6126480" y="1463040"/>
-            <a:ext cx="5029200" cy="1371600"/>
-          </a:xfrm>
-          <a:prstGeom prst="roundRect">
-            <a:avLst/>
-          </a:prstGeom>
-          <a:solidFill>
-            <a:srgbClr val="F3F3F3"/>
-          </a:solidFill>
-          <a:ln w="12700">
-            <a:solidFill>
-              <a:srgbClr val="DDDDDD"/>
-            </a:solidFill>
-          </a:ln>
-          <a:effectLst/>
-        </p:spPr>
-        <p:style>
-          <a:lnRef idx="1">
-            <a:schemeClr val="accent1"/>
-          </a:lnRef>
-          <a:fillRef idx="3">
-            <a:schemeClr val="accent1"/>
-          </a:fillRef>
-          <a:effectRef idx="2">
-            <a:schemeClr val="accent1"/>
-          </a:effectRef>
-          <a:fontRef idx="minor">
-            <a:schemeClr val="lt1"/>
-          </a:fontRef>
-        </p:style>
-        <p:txBody>
-          <a:bodyPr wrap="square" lIns="137160" tIns="91440" rtlCol="0" anchor="ctr"/>
-          <a:lstStyle/>
-          <a:p>
-            <a:pPr algn="ctr">
-              <a:spcAft>
-                <a:spcPts val="400"/>
-              </a:spcAft>
-            </a:pPr>
-            <a:r>
-              <a:rPr sz="1300" b="1" dirty="0">
-                <a:solidFill>
-                  <a:srgbClr val="058DC7"/>
-                </a:solidFill>
-                <a:latin typeface="Montserrat"/>
-              </a:rPr>
-              <a:t>Ex 2: CLASSIFY_TEXT()</a:t>
-            </a:r>
-          </a:p>
-          <a:p>
-            <a:pPr>
-              <a:spcBef>
-                <a:spcPts val="100"/>
-              </a:spcBef>
-              <a:spcAft>
-                <a:spcPts val="100"/>
-              </a:spcAft>
-            </a:pPr>
-            <a:r>
-              <a:rPr dirty="0">
-                <a:solidFill>
-                  <a:srgbClr val="333333"/>
-                </a:solidFill>
-                <a:latin typeface="Montserrat"/>
-              </a:rPr>
-              <a:t>▸ Route feedback to support teams</a:t>
-            </a:r>
-          </a:p>
-          <a:p>
-            <a:pPr>
-              <a:spcBef>
-                <a:spcPts val="100"/>
-              </a:spcBef>
-              <a:spcAft>
-                <a:spcPts val="100"/>
-              </a:spcAft>
-            </a:pPr>
-            <a:r>
-              <a:rPr dirty="0">
-                <a:solidFill>
-                  <a:srgbClr val="333333"/>
-                </a:solidFill>
-                <a:latin typeface="Montserrat"/>
-              </a:rPr>
-              <a:t>▸ Zero-shot classification</a:t>
-            </a:r>
-          </a:p>
-        </p:txBody>
-      </p:sp>
-      <p:sp>
-        <p:nvSpPr>
-          <p:cNvPr id="6" name="Rounded Rectangle 5"/>
-          <p:cNvSpPr/>
-          <p:nvPr/>
-        </p:nvSpPr>
-        <p:spPr>
-          <a:xfrm>
-            <a:off x="640080" y="3108960"/>
-            <a:ext cx="5029200" cy="1371600"/>
-          </a:xfrm>
-          <a:prstGeom prst="roundRect">
-            <a:avLst/>
-          </a:prstGeom>
-          <a:solidFill>
-            <a:srgbClr val="F3F3F3"/>
-          </a:solidFill>
-          <a:ln w="12700">
-            <a:solidFill>
-              <a:srgbClr val="DDDDDD"/>
-            </a:solidFill>
-          </a:ln>
-          <a:effectLst/>
-        </p:spPr>
-        <p:style>
-          <a:lnRef idx="1">
-            <a:schemeClr val="accent1"/>
-          </a:lnRef>
-          <a:fillRef idx="3">
-            <a:schemeClr val="accent1"/>
-          </a:fillRef>
-          <a:effectRef idx="2">
-            <a:schemeClr val="accent1"/>
-          </a:effectRef>
-          <a:fontRef idx="minor">
-            <a:schemeClr val="lt1"/>
-          </a:fontRef>
-        </p:style>
-        <p:txBody>
-          <a:bodyPr wrap="square" lIns="137160" tIns="91440" rtlCol="0" anchor="ctr"/>
-          <a:lstStyle/>
-          <a:p>
-            <a:pPr algn="ctr">
-              <a:spcAft>
-                <a:spcPts val="400"/>
-              </a:spcAft>
-            </a:pPr>
-            <a:r>
-              <a:rPr sz="1300" b="1" dirty="0">
-                <a:solidFill>
-                  <a:srgbClr val="058DC7"/>
-                </a:solidFill>
-                <a:latin typeface="Montserrat"/>
-              </a:rPr>
-              <a:t>Ex 3: COMPLETE()</a:t>
-            </a:r>
-          </a:p>
-          <a:p>
-            <a:pPr>
-              <a:spcBef>
-                <a:spcPts val="100"/>
-              </a:spcBef>
-              <a:spcAft>
-                <a:spcPts val="100"/>
-              </a:spcAft>
-            </a:pPr>
-            <a:r>
-              <a:rPr dirty="0">
-                <a:solidFill>
-                  <a:srgbClr val="333333"/>
-                </a:solidFill>
-                <a:latin typeface="Montserrat"/>
-              </a:rPr>
-              <a:t>▸ Extract structured info from text</a:t>
-            </a:r>
-          </a:p>
-          <a:p>
-            <a:pPr>
-              <a:spcBef>
-                <a:spcPts val="100"/>
-              </a:spcBef>
-              <a:spcAft>
-                <a:spcPts val="100"/>
-              </a:spcAft>
-            </a:pPr>
-            <a:r>
-              <a:rPr dirty="0">
-                <a:solidFill>
-                  <a:srgbClr val="333333"/>
-                </a:solidFill>
-                <a:latin typeface="Montserrat"/>
-              </a:rPr>
-              <a:t>▸ Using budget model mistral-7b</a:t>
-            </a:r>
-          </a:p>
-        </p:txBody>
-      </p:sp>
-      <p:sp>
-        <p:nvSpPr>
-          <p:cNvPr id="7" name="Rounded Rectangle 6"/>
-          <p:cNvSpPr/>
-          <p:nvPr/>
-        </p:nvSpPr>
-        <p:spPr>
-          <a:xfrm>
-            <a:off x="6126480" y="3108960"/>
-            <a:ext cx="5029200" cy="1371600"/>
-          </a:xfrm>
-          <a:prstGeom prst="roundRect">
-            <a:avLst/>
-          </a:prstGeom>
-          <a:solidFill>
-            <a:srgbClr val="F3F3F3"/>
-          </a:solidFill>
-          <a:ln w="25400">
-            <a:solidFill>
-              <a:srgbClr val="CC0000"/>
-            </a:solidFill>
-          </a:ln>
-          <a:effectLst/>
-        </p:spPr>
-        <p:style>
-          <a:lnRef idx="1">
-            <a:schemeClr val="accent1"/>
-          </a:lnRef>
-          <a:fillRef idx="3">
-            <a:schemeClr val="accent1"/>
-          </a:fillRef>
-          <a:effectRef idx="2">
-            <a:schemeClr val="accent1"/>
-          </a:effectRef>
-          <a:fontRef idx="minor">
-            <a:schemeClr val="lt1"/>
-          </a:fontRef>
-        </p:style>
-        <p:txBody>
-          <a:bodyPr wrap="square" lIns="137160" tIns="91440" rtlCol="0" anchor="ctr"/>
-          <a:lstStyle/>
-          <a:p>
-            <a:pPr algn="ctr">
-              <a:spcAft>
-                <a:spcPts val="400"/>
-              </a:spcAft>
-            </a:pPr>
-            <a:r>
-              <a:rPr sz="1300" b="1" dirty="0">
-                <a:solidFill>
-                  <a:srgbClr val="CC0000"/>
-                </a:solidFill>
-                <a:latin typeface="Montserrat"/>
-              </a:rPr>
-              <a:t>Ex 4: Model Cost Comparison</a:t>
-            </a:r>
-          </a:p>
-          <a:p>
-            <a:pPr>
-              <a:spcBef>
-                <a:spcPts val="100"/>
-              </a:spcBef>
-              <a:spcAft>
-                <a:spcPts val="100"/>
-              </a:spcAft>
-            </a:pPr>
-            <a:r>
-              <a:rPr dirty="0">
-                <a:solidFill>
-                  <a:srgbClr val="333333"/>
-                </a:solidFill>
-                <a:latin typeface="Montserrat"/>
-              </a:rPr>
-              <a:t>▸ Same prompt, 3 models:</a:t>
-            </a:r>
-          </a:p>
-          <a:p>
-            <a:pPr>
-              <a:spcBef>
-                <a:spcPts val="100"/>
-              </a:spcBef>
-              <a:spcAft>
-                <a:spcPts val="100"/>
-              </a:spcAft>
-            </a:pPr>
-            <a:r>
-              <a:rPr dirty="0">
-                <a:solidFill>
-                  <a:srgbClr val="333333"/>
-                </a:solidFill>
-                <a:latin typeface="Montserrat"/>
-              </a:rPr>
-              <a:t>▸ mistral-7b vs llama3-70b vs claude-3-5-sonnet</a:t>
-            </a:r>
-          </a:p>
-        </p:txBody>
-      </p:sp>
-      <p:sp>
-        <p:nvSpPr>
-          <p:cNvPr id="8" name="Rounded Rectangle 7"/>
-          <p:cNvSpPr/>
-          <p:nvPr/>
-        </p:nvSpPr>
-        <p:spPr>
-          <a:xfrm>
-            <a:off x="1745672" y="4754880"/>
-            <a:ext cx="8562109" cy="914400"/>
-          </a:xfrm>
-          <a:prstGeom prst="roundRect">
-            <a:avLst/>
-          </a:prstGeom>
-          <a:solidFill>
-            <a:srgbClr val="F3F3F3"/>
-          </a:solidFill>
-          <a:ln w="12700">
-            <a:solidFill>
-              <a:srgbClr val="DDDDDD"/>
-            </a:solidFill>
-          </a:ln>
-          <a:effectLst/>
-        </p:spPr>
-        <p:style>
-          <a:lnRef idx="1">
-            <a:schemeClr val="accent1"/>
-          </a:lnRef>
-          <a:fillRef idx="3">
-            <a:schemeClr val="accent1"/>
-          </a:fillRef>
-          <a:effectRef idx="2">
-            <a:schemeClr val="accent1"/>
-          </a:effectRef>
-          <a:fontRef idx="minor">
-            <a:schemeClr val="lt1"/>
-          </a:fontRef>
-        </p:style>
-        <p:txBody>
-          <a:bodyPr wrap="square" lIns="137160" tIns="91440" rtlCol="0" anchor="ctr"/>
-          <a:lstStyle/>
-          <a:p>
-            <a:pPr algn="ctr">
-              <a:spcAft>
-                <a:spcPts val="400"/>
-              </a:spcAft>
-            </a:pPr>
-            <a:r>
-              <a:rPr sz="1300" b="1" dirty="0">
-                <a:solidFill>
-                  <a:srgbClr val="058DC7"/>
-                </a:solidFill>
-                <a:latin typeface="Montserrat"/>
-              </a:rPr>
-              <a:t>Ex 5: Scale Simulation</a:t>
-            </a:r>
-          </a:p>
-          <a:p>
-            <a:pPr>
-              <a:spcBef>
-                <a:spcPts val="100"/>
-              </a:spcBef>
-              <a:spcAft>
-                <a:spcPts val="100"/>
-              </a:spcAft>
-            </a:pPr>
-            <a:r>
-              <a:rPr dirty="0">
-                <a:solidFill>
-                  <a:srgbClr val="333333"/>
-                </a:solidFill>
-                <a:latin typeface="Montserrat"/>
-              </a:rPr>
-              <a:t>▸ Test on 5 rows → measure cost → project to 500K rows → decide</a:t>
             </a:r>
           </a:p>
         </p:txBody>
